--- a/submission/Debie_Galleros_Pillar5_CapstoneProject_TechnicalDeck.pptx
+++ b/submission/Debie_Galleros_Pillar5_CapstoneProject_TechnicalDeck.pptx
@@ -5,19 +5,19 @@
     <p:sldMasterId id="2147483648" r:id="rId1"/>
   </p:sldMasterIdLst>
   <p:sldIdLst>
-    <p:sldId id="256" r:id="rId7"/>
-    <p:sldId id="257" r:id="rId8"/>
-    <p:sldId id="258" r:id="rId9"/>
-    <p:sldId id="259" r:id="rId10"/>
-    <p:sldId id="260" r:id="rId11"/>
-    <p:sldId id="261" r:id="rId12"/>
-    <p:sldId id="262" r:id="rId13"/>
-    <p:sldId id="263" r:id="rId14"/>
-    <p:sldId id="264" r:id="rId15"/>
-    <p:sldId id="265" r:id="rId16"/>
-    <p:sldId id="266" r:id="rId17"/>
+    <p:sldId id="256" r:id="rId2"/>
+    <p:sldId id="257" r:id="rId3"/>
+    <p:sldId id="258" r:id="rId4"/>
+    <p:sldId id="259" r:id="rId5"/>
+    <p:sldId id="260" r:id="rId6"/>
+    <p:sldId id="261" r:id="rId7"/>
+    <p:sldId id="262" r:id="rId8"/>
+    <p:sldId id="263" r:id="rId9"/>
+    <p:sldId id="264" r:id="rId10"/>
+    <p:sldId id="265" r:id="rId11"/>
+    <p:sldId id="266" r:id="rId12"/>
   </p:sldIdLst>
-  <p:sldSz cx="12191695" cy="6858000" type="screen4x3"/>
+  <p:sldSz cx="12192000" cy="6858000"/>
   <p:notesSz cx="6858000" cy="9144000"/>
   <p:defaultTextStyle>
     <a:defPPr>
@@ -114,6 +114,22 @@
       </a:defRPr>
     </a:lvl9pPr>
   </p:defaultTextStyle>
+  <p:extLst>
+    <p:ext uri="{EFAFB233-063F-42B5-8137-9DF3F51BA10A}">
+      <p15:sldGuideLst xmlns:p15="http://schemas.microsoft.com/office/powerpoint/2012/main">
+        <p15:guide id="1" orient="horz" pos="2160">
+          <p15:clr>
+            <a:srgbClr val="A4A3A4"/>
+          </p15:clr>
+        </p15:guide>
+        <p15:guide id="2" pos="2880">
+          <p15:clr>
+            <a:srgbClr val="A4A3A4"/>
+          </p15:clr>
+        </p15:guide>
+      </p15:sldGuideLst>
+    </p:ext>
+  </p:extLst>
 </p:presentation>
 </file>
 
@@ -155,10 +171,9 @@
           <a:lstStyle/>
           <a:p>
             <a:r>
-              <a:rPr lang="en-US" smtClean="0"/>
+              <a:rPr lang="en-US"/>
               <a:t>Click to edit Master title style</a:t>
             </a:r>
-            <a:endParaRPr lang="en-US"/>
           </a:p>
         </p:txBody>
       </p:sp>
@@ -274,10 +289,9 @@
           </a:lstStyle>
           <a:p>
             <a:r>
-              <a:rPr lang="en-US" smtClean="0"/>
+              <a:rPr lang="en-US"/>
               <a:t>Click to edit Master subtitle style</a:t>
             </a:r>
-            <a:endParaRPr lang="en-US"/>
           </a:p>
         </p:txBody>
       </p:sp>
@@ -298,7 +312,7 @@
           <a:p>
             <a:fld id="{5BCAD085-E8A6-8845-BD4E-CB4CCA059FC4}" type="datetimeFigureOut">
               <a:rPr lang="en-US" smtClean="0"/>
-              <a:t>1/27/13</a:t>
+              <a:t>7/12/26</a:t>
             </a:fld>
             <a:endParaRPr lang="en-US"/>
           </a:p>
@@ -392,10 +406,9 @@
           <a:lstStyle/>
           <a:p>
             <a:r>
-              <a:rPr lang="en-US" smtClean="0"/>
+              <a:rPr lang="en-US"/>
               <a:t>Click to edit Master title style</a:t>
             </a:r>
-            <a:endParaRPr lang="en-US"/>
           </a:p>
         </p:txBody>
       </p:sp>
@@ -416,38 +429,37 @@
           <a:p>
             <a:pPr lvl="0"/>
             <a:r>
-              <a:rPr lang="en-US" smtClean="0"/>
+              <a:rPr lang="en-US"/>
               <a:t>Click to edit Master text styles</a:t>
             </a:r>
           </a:p>
           <a:p>
             <a:pPr lvl="1"/>
             <a:r>
-              <a:rPr lang="en-US" smtClean="0"/>
+              <a:rPr lang="en-US"/>
               <a:t>Second level</a:t>
             </a:r>
           </a:p>
           <a:p>
             <a:pPr lvl="2"/>
             <a:r>
-              <a:rPr lang="en-US" smtClean="0"/>
+              <a:rPr lang="en-US"/>
               <a:t>Third level</a:t>
             </a:r>
           </a:p>
           <a:p>
             <a:pPr lvl="3"/>
             <a:r>
-              <a:rPr lang="en-US" smtClean="0"/>
+              <a:rPr lang="en-US"/>
               <a:t>Fourth level</a:t>
             </a:r>
           </a:p>
           <a:p>
             <a:pPr lvl="4"/>
             <a:r>
-              <a:rPr lang="en-US" smtClean="0"/>
+              <a:rPr lang="en-US"/>
               <a:t>Fifth level</a:t>
             </a:r>
-            <a:endParaRPr lang="en-US"/>
           </a:p>
         </p:txBody>
       </p:sp>
@@ -468,7 +480,7 @@
           <a:p>
             <a:fld id="{5BCAD085-E8A6-8845-BD4E-CB4CCA059FC4}" type="datetimeFigureOut">
               <a:rPr lang="en-US" smtClean="0"/>
-              <a:t>1/27/13</a:t>
+              <a:t>7/12/26</a:t>
             </a:fld>
             <a:endParaRPr lang="en-US"/>
           </a:p>
@@ -567,10 +579,9 @@
           <a:lstStyle/>
           <a:p>
             <a:r>
-              <a:rPr lang="en-US" smtClean="0"/>
+              <a:rPr lang="en-US"/>
               <a:t>Click to edit Master title style</a:t>
             </a:r>
-            <a:endParaRPr lang="en-US"/>
           </a:p>
         </p:txBody>
       </p:sp>
@@ -596,38 +607,37 @@
           <a:p>
             <a:pPr lvl="0"/>
             <a:r>
-              <a:rPr lang="en-US" smtClean="0"/>
+              <a:rPr lang="en-US"/>
               <a:t>Click to edit Master text styles</a:t>
             </a:r>
           </a:p>
           <a:p>
             <a:pPr lvl="1"/>
             <a:r>
-              <a:rPr lang="en-US" smtClean="0"/>
+              <a:rPr lang="en-US"/>
               <a:t>Second level</a:t>
             </a:r>
           </a:p>
           <a:p>
             <a:pPr lvl="2"/>
             <a:r>
-              <a:rPr lang="en-US" smtClean="0"/>
+              <a:rPr lang="en-US"/>
               <a:t>Third level</a:t>
             </a:r>
           </a:p>
           <a:p>
             <a:pPr lvl="3"/>
             <a:r>
-              <a:rPr lang="en-US" smtClean="0"/>
+              <a:rPr lang="en-US"/>
               <a:t>Fourth level</a:t>
             </a:r>
           </a:p>
           <a:p>
             <a:pPr lvl="4"/>
             <a:r>
-              <a:rPr lang="en-US" smtClean="0"/>
+              <a:rPr lang="en-US"/>
               <a:t>Fifth level</a:t>
             </a:r>
-            <a:endParaRPr lang="en-US"/>
           </a:p>
         </p:txBody>
       </p:sp>
@@ -648,7 +658,7 @@
           <a:p>
             <a:fld id="{5BCAD085-E8A6-8845-BD4E-CB4CCA059FC4}" type="datetimeFigureOut">
               <a:rPr lang="en-US" smtClean="0"/>
-              <a:t>1/27/13</a:t>
+              <a:t>7/12/26</a:t>
             </a:fld>
             <a:endParaRPr lang="en-US"/>
           </a:p>
@@ -742,10 +752,9 @@
           <a:lstStyle/>
           <a:p>
             <a:r>
-              <a:rPr lang="en-US" smtClean="0"/>
+              <a:rPr lang="en-US"/>
               <a:t>Click to edit Master title style</a:t>
             </a:r>
-            <a:endParaRPr lang="en-US"/>
           </a:p>
         </p:txBody>
       </p:sp>
@@ -766,38 +775,37 @@
           <a:p>
             <a:pPr lvl="0"/>
             <a:r>
-              <a:rPr lang="en-US" smtClean="0"/>
+              <a:rPr lang="en-US"/>
               <a:t>Click to edit Master text styles</a:t>
             </a:r>
           </a:p>
           <a:p>
             <a:pPr lvl="1"/>
             <a:r>
-              <a:rPr lang="en-US" smtClean="0"/>
+              <a:rPr lang="en-US"/>
               <a:t>Second level</a:t>
             </a:r>
           </a:p>
           <a:p>
             <a:pPr lvl="2"/>
             <a:r>
-              <a:rPr lang="en-US" smtClean="0"/>
+              <a:rPr lang="en-US"/>
               <a:t>Third level</a:t>
             </a:r>
           </a:p>
           <a:p>
             <a:pPr lvl="3"/>
             <a:r>
-              <a:rPr lang="en-US" smtClean="0"/>
+              <a:rPr lang="en-US"/>
               <a:t>Fourth level</a:t>
             </a:r>
           </a:p>
           <a:p>
             <a:pPr lvl="4"/>
             <a:r>
-              <a:rPr lang="en-US" smtClean="0"/>
+              <a:rPr lang="en-US"/>
               <a:t>Fifth level</a:t>
             </a:r>
-            <a:endParaRPr lang="en-US"/>
           </a:p>
         </p:txBody>
       </p:sp>
@@ -818,7 +826,7 @@
           <a:p>
             <a:fld id="{5BCAD085-E8A6-8845-BD4E-CB4CCA059FC4}" type="datetimeFigureOut">
               <a:rPr lang="en-US" smtClean="0"/>
-              <a:t>1/27/13</a:t>
+              <a:t>7/12/26</a:t>
             </a:fld>
             <a:endParaRPr lang="en-US"/>
           </a:p>
@@ -921,10 +929,9 @@
           </a:lstStyle>
           <a:p>
             <a:r>
-              <a:rPr lang="en-US" smtClean="0"/>
+              <a:rPr lang="en-US"/>
               <a:t>Click to edit Master title style</a:t>
             </a:r>
-            <a:endParaRPr lang="en-US"/>
           </a:p>
         </p:txBody>
       </p:sp>
@@ -1041,7 +1048,7 @@
           <a:p>
             <a:pPr lvl="0"/>
             <a:r>
-              <a:rPr lang="en-US" smtClean="0"/>
+              <a:rPr lang="en-US"/>
               <a:t>Click to edit Master text styles</a:t>
             </a:r>
           </a:p>
@@ -1064,7 +1071,7 @@
           <a:p>
             <a:fld id="{5BCAD085-E8A6-8845-BD4E-CB4CCA059FC4}" type="datetimeFigureOut">
               <a:rPr lang="en-US" smtClean="0"/>
-              <a:t>1/27/13</a:t>
+              <a:t>7/12/26</a:t>
             </a:fld>
             <a:endParaRPr lang="en-US"/>
           </a:p>
@@ -1158,10 +1165,9 @@
           <a:lstStyle/>
           <a:p>
             <a:r>
-              <a:rPr lang="en-US" smtClean="0"/>
+              <a:rPr lang="en-US"/>
               <a:t>Click to edit Master title style</a:t>
             </a:r>
-            <a:endParaRPr lang="en-US"/>
           </a:p>
         </p:txBody>
       </p:sp>
@@ -1215,38 +1221,37 @@
           <a:p>
             <a:pPr lvl="0"/>
             <a:r>
-              <a:rPr lang="en-US" smtClean="0"/>
+              <a:rPr lang="en-US"/>
               <a:t>Click to edit Master text styles</a:t>
             </a:r>
           </a:p>
           <a:p>
             <a:pPr lvl="1"/>
             <a:r>
-              <a:rPr lang="en-US" smtClean="0"/>
+              <a:rPr lang="en-US"/>
               <a:t>Second level</a:t>
             </a:r>
           </a:p>
           <a:p>
             <a:pPr lvl="2"/>
             <a:r>
-              <a:rPr lang="en-US" smtClean="0"/>
+              <a:rPr lang="en-US"/>
               <a:t>Third level</a:t>
             </a:r>
           </a:p>
           <a:p>
             <a:pPr lvl="3"/>
             <a:r>
-              <a:rPr lang="en-US" smtClean="0"/>
+              <a:rPr lang="en-US"/>
               <a:t>Fourth level</a:t>
             </a:r>
           </a:p>
           <a:p>
             <a:pPr lvl="4"/>
             <a:r>
-              <a:rPr lang="en-US" smtClean="0"/>
+              <a:rPr lang="en-US"/>
               <a:t>Fifth level</a:t>
             </a:r>
-            <a:endParaRPr lang="en-US"/>
           </a:p>
         </p:txBody>
       </p:sp>
@@ -1300,38 +1305,37 @@
           <a:p>
             <a:pPr lvl="0"/>
             <a:r>
-              <a:rPr lang="en-US" smtClean="0"/>
+              <a:rPr lang="en-US"/>
               <a:t>Click to edit Master text styles</a:t>
             </a:r>
           </a:p>
           <a:p>
             <a:pPr lvl="1"/>
             <a:r>
-              <a:rPr lang="en-US" smtClean="0"/>
+              <a:rPr lang="en-US"/>
               <a:t>Second level</a:t>
             </a:r>
           </a:p>
           <a:p>
             <a:pPr lvl="2"/>
             <a:r>
-              <a:rPr lang="en-US" smtClean="0"/>
+              <a:rPr lang="en-US"/>
               <a:t>Third level</a:t>
             </a:r>
           </a:p>
           <a:p>
             <a:pPr lvl="3"/>
             <a:r>
-              <a:rPr lang="en-US" smtClean="0"/>
+              <a:rPr lang="en-US"/>
               <a:t>Fourth level</a:t>
             </a:r>
           </a:p>
           <a:p>
             <a:pPr lvl="4"/>
             <a:r>
-              <a:rPr lang="en-US" smtClean="0"/>
+              <a:rPr lang="en-US"/>
               <a:t>Fifth level</a:t>
             </a:r>
-            <a:endParaRPr lang="en-US"/>
           </a:p>
         </p:txBody>
       </p:sp>
@@ -1352,7 +1356,7 @@
           <a:p>
             <a:fld id="{5BCAD085-E8A6-8845-BD4E-CB4CCA059FC4}" type="datetimeFigureOut">
               <a:rPr lang="en-US" smtClean="0"/>
-              <a:t>1/27/13</a:t>
+              <a:t>7/12/26</a:t>
             </a:fld>
             <a:endParaRPr lang="en-US"/>
           </a:p>
@@ -1450,10 +1454,9 @@
           </a:lstStyle>
           <a:p>
             <a:r>
-              <a:rPr lang="en-US" smtClean="0"/>
+              <a:rPr lang="en-US"/>
               <a:t>Click to edit Master title style</a:t>
             </a:r>
-            <a:endParaRPr lang="en-US"/>
           </a:p>
         </p:txBody>
       </p:sp>
@@ -1516,7 +1519,7 @@
           <a:p>
             <a:pPr lvl="0"/>
             <a:r>
-              <a:rPr lang="en-US" smtClean="0"/>
+              <a:rPr lang="en-US"/>
               <a:t>Click to edit Master text styles</a:t>
             </a:r>
           </a:p>
@@ -1572,38 +1575,37 @@
           <a:p>
             <a:pPr lvl="0"/>
             <a:r>
-              <a:rPr lang="en-US" smtClean="0"/>
+              <a:rPr lang="en-US"/>
               <a:t>Click to edit Master text styles</a:t>
             </a:r>
           </a:p>
           <a:p>
             <a:pPr lvl="1"/>
             <a:r>
-              <a:rPr lang="en-US" smtClean="0"/>
+              <a:rPr lang="en-US"/>
               <a:t>Second level</a:t>
             </a:r>
           </a:p>
           <a:p>
             <a:pPr lvl="2"/>
             <a:r>
-              <a:rPr lang="en-US" smtClean="0"/>
+              <a:rPr lang="en-US"/>
               <a:t>Third level</a:t>
             </a:r>
           </a:p>
           <a:p>
             <a:pPr lvl="3"/>
             <a:r>
-              <a:rPr lang="en-US" smtClean="0"/>
+              <a:rPr lang="en-US"/>
               <a:t>Fourth level</a:t>
             </a:r>
           </a:p>
           <a:p>
             <a:pPr lvl="4"/>
             <a:r>
-              <a:rPr lang="en-US" smtClean="0"/>
+              <a:rPr lang="en-US"/>
               <a:t>Fifth level</a:t>
             </a:r>
-            <a:endParaRPr lang="en-US"/>
           </a:p>
         </p:txBody>
       </p:sp>
@@ -1666,7 +1668,7 @@
           <a:p>
             <a:pPr lvl="0"/>
             <a:r>
-              <a:rPr lang="en-US" smtClean="0"/>
+              <a:rPr lang="en-US"/>
               <a:t>Click to edit Master text styles</a:t>
             </a:r>
           </a:p>
@@ -1722,38 +1724,37 @@
           <a:p>
             <a:pPr lvl="0"/>
             <a:r>
-              <a:rPr lang="en-US" smtClean="0"/>
+              <a:rPr lang="en-US"/>
               <a:t>Click to edit Master text styles</a:t>
             </a:r>
           </a:p>
           <a:p>
             <a:pPr lvl="1"/>
             <a:r>
-              <a:rPr lang="en-US" smtClean="0"/>
+              <a:rPr lang="en-US"/>
               <a:t>Second level</a:t>
             </a:r>
           </a:p>
           <a:p>
             <a:pPr lvl="2"/>
             <a:r>
-              <a:rPr lang="en-US" smtClean="0"/>
+              <a:rPr lang="en-US"/>
               <a:t>Third level</a:t>
             </a:r>
           </a:p>
           <a:p>
             <a:pPr lvl="3"/>
             <a:r>
-              <a:rPr lang="en-US" smtClean="0"/>
+              <a:rPr lang="en-US"/>
               <a:t>Fourth level</a:t>
             </a:r>
           </a:p>
           <a:p>
             <a:pPr lvl="4"/>
             <a:r>
-              <a:rPr lang="en-US" smtClean="0"/>
+              <a:rPr lang="en-US"/>
               <a:t>Fifth level</a:t>
             </a:r>
-            <a:endParaRPr lang="en-US"/>
           </a:p>
         </p:txBody>
       </p:sp>
@@ -1774,7 +1775,7 @@
           <a:p>
             <a:fld id="{5BCAD085-E8A6-8845-BD4E-CB4CCA059FC4}" type="datetimeFigureOut">
               <a:rPr lang="en-US" smtClean="0"/>
-              <a:t>1/27/13</a:t>
+              <a:t>7/12/26</a:t>
             </a:fld>
             <a:endParaRPr lang="en-US"/>
           </a:p>
@@ -1868,10 +1869,9 @@
           <a:lstStyle/>
           <a:p>
             <a:r>
-              <a:rPr lang="en-US" smtClean="0"/>
+              <a:rPr lang="en-US"/>
               <a:t>Click to edit Master title style</a:t>
             </a:r>
-            <a:endParaRPr lang="en-US"/>
           </a:p>
         </p:txBody>
       </p:sp>
@@ -1892,7 +1892,7 @@
           <a:p>
             <a:fld id="{5BCAD085-E8A6-8845-BD4E-CB4CCA059FC4}" type="datetimeFigureOut">
               <a:rPr lang="en-US" smtClean="0"/>
-              <a:t>1/27/13</a:t>
+              <a:t>7/12/26</a:t>
             </a:fld>
             <a:endParaRPr lang="en-US"/>
           </a:p>
@@ -1987,7 +1987,7 @@
           <a:p>
             <a:fld id="{5BCAD085-E8A6-8845-BD4E-CB4CCA059FC4}" type="datetimeFigureOut">
               <a:rPr lang="en-US" smtClean="0"/>
-              <a:t>1/27/13</a:t>
+              <a:t>7/12/26</a:t>
             </a:fld>
             <a:endParaRPr lang="en-US"/>
           </a:p>
@@ -2090,10 +2090,9 @@
           </a:lstStyle>
           <a:p>
             <a:r>
-              <a:rPr lang="en-US" smtClean="0"/>
+              <a:rPr lang="en-US"/>
               <a:t>Click to edit Master title style</a:t>
             </a:r>
-            <a:endParaRPr lang="en-US"/>
           </a:p>
         </p:txBody>
       </p:sp>
@@ -2147,38 +2146,37 @@
           <a:p>
             <a:pPr lvl="0"/>
             <a:r>
-              <a:rPr lang="en-US" smtClean="0"/>
+              <a:rPr lang="en-US"/>
               <a:t>Click to edit Master text styles</a:t>
             </a:r>
           </a:p>
           <a:p>
             <a:pPr lvl="1"/>
             <a:r>
-              <a:rPr lang="en-US" smtClean="0"/>
+              <a:rPr lang="en-US"/>
               <a:t>Second level</a:t>
             </a:r>
           </a:p>
           <a:p>
             <a:pPr lvl="2"/>
             <a:r>
-              <a:rPr lang="en-US" smtClean="0"/>
+              <a:rPr lang="en-US"/>
               <a:t>Third level</a:t>
             </a:r>
           </a:p>
           <a:p>
             <a:pPr lvl="3"/>
             <a:r>
-              <a:rPr lang="en-US" smtClean="0"/>
+              <a:rPr lang="en-US"/>
               <a:t>Fourth level</a:t>
             </a:r>
           </a:p>
           <a:p>
             <a:pPr lvl="4"/>
             <a:r>
-              <a:rPr lang="en-US" smtClean="0"/>
+              <a:rPr lang="en-US"/>
               <a:t>Fifth level</a:t>
             </a:r>
-            <a:endParaRPr lang="en-US"/>
           </a:p>
         </p:txBody>
       </p:sp>
@@ -2241,7 +2239,7 @@
           <a:p>
             <a:pPr lvl="0"/>
             <a:r>
-              <a:rPr lang="en-US" smtClean="0"/>
+              <a:rPr lang="en-US"/>
               <a:t>Click to edit Master text styles</a:t>
             </a:r>
           </a:p>
@@ -2264,7 +2262,7 @@
           <a:p>
             <a:fld id="{5BCAD085-E8A6-8845-BD4E-CB4CCA059FC4}" type="datetimeFigureOut">
               <a:rPr lang="en-US" smtClean="0"/>
-              <a:t>1/27/13</a:t>
+              <a:t>7/12/26</a:t>
             </a:fld>
             <a:endParaRPr lang="en-US"/>
           </a:p>
@@ -2367,10 +2365,9 @@
           </a:lstStyle>
           <a:p>
             <a:r>
-              <a:rPr lang="en-US" smtClean="0"/>
+              <a:rPr lang="en-US"/>
               <a:t>Click to edit Master title style</a:t>
             </a:r>
-            <a:endParaRPr lang="en-US"/>
           </a:p>
         </p:txBody>
       </p:sp>
@@ -2494,7 +2491,7 @@
           <a:p>
             <a:pPr lvl="0"/>
             <a:r>
-              <a:rPr lang="en-US" smtClean="0"/>
+              <a:rPr lang="en-US"/>
               <a:t>Click to edit Master text styles</a:t>
             </a:r>
           </a:p>
@@ -2517,7 +2514,7 @@
           <a:p>
             <a:fld id="{5BCAD085-E8A6-8845-BD4E-CB4CCA059FC4}" type="datetimeFigureOut">
               <a:rPr lang="en-US" smtClean="0"/>
-              <a:t>1/27/13</a:t>
+              <a:t>7/12/26</a:t>
             </a:fld>
             <a:endParaRPr lang="en-US"/>
           </a:p>
@@ -2626,10 +2623,9 @@
           <a:lstStyle/>
           <a:p>
             <a:r>
-              <a:rPr lang="en-US" smtClean="0"/>
+              <a:rPr lang="en-US"/>
               <a:t>Click to edit Master title style</a:t>
             </a:r>
-            <a:endParaRPr lang="en-US"/>
           </a:p>
         </p:txBody>
       </p:sp>
@@ -2660,38 +2656,37 @@
           <a:p>
             <a:pPr lvl="0"/>
             <a:r>
-              <a:rPr lang="en-US" smtClean="0"/>
+              <a:rPr lang="en-US"/>
               <a:t>Click to edit Master text styles</a:t>
             </a:r>
           </a:p>
           <a:p>
             <a:pPr lvl="1"/>
             <a:r>
-              <a:rPr lang="en-US" smtClean="0"/>
+              <a:rPr lang="en-US"/>
               <a:t>Second level</a:t>
             </a:r>
           </a:p>
           <a:p>
             <a:pPr lvl="2"/>
             <a:r>
-              <a:rPr lang="en-US" smtClean="0"/>
+              <a:rPr lang="en-US"/>
               <a:t>Third level</a:t>
             </a:r>
           </a:p>
           <a:p>
             <a:pPr lvl="3"/>
             <a:r>
-              <a:rPr lang="en-US" smtClean="0"/>
+              <a:rPr lang="en-US"/>
               <a:t>Fourth level</a:t>
             </a:r>
           </a:p>
           <a:p>
             <a:pPr lvl="4"/>
             <a:r>
-              <a:rPr lang="en-US" smtClean="0"/>
+              <a:rPr lang="en-US"/>
               <a:t>Fifth level</a:t>
             </a:r>
-            <a:endParaRPr lang="en-US"/>
           </a:p>
         </p:txBody>
       </p:sp>
@@ -2730,7 +2725,7 @@
           <a:p>
             <a:fld id="{5BCAD085-E8A6-8845-BD4E-CB4CCA059FC4}" type="datetimeFigureOut">
               <a:rPr lang="en-US" smtClean="0"/>
-              <a:t>1/27/13</a:t>
+              <a:t>7/12/26</a:t>
             </a:fld>
             <a:endParaRPr lang="en-US"/>
           </a:p>
@@ -3089,7 +3084,7 @@
 </file>
 
 <file path=ppt/slides/slide1.xml><?xml version="1.0" encoding="utf-8"?>
-<p:sld xmlns:a="http://schemas.openxmlformats.org/drawingml/2006/main" xmlns:p="http://schemas.openxmlformats.org/presentationml/2006/main" xmlns:r="http://schemas.openxmlformats.org/officeDocument/2006/relationships">
+<p:sld xmlns:a="http://schemas.openxmlformats.org/drawingml/2006/main" xmlns:r="http://schemas.openxmlformats.org/officeDocument/2006/relationships" xmlns:p="http://schemas.openxmlformats.org/presentationml/2006/main">
   <p:cSld>
     <p:spTree>
       <p:nvGrpSpPr>
@@ -3097,7 +3092,14 @@
         <p:cNvGrpSpPr/>
         <p:nvPr/>
       </p:nvGrpSpPr>
-      <p:grpSpPr/>
+      <p:grpSpPr>
+        <a:xfrm>
+          <a:off x="0" y="0"/>
+          <a:ext cx="0" cy="0"/>
+          <a:chOff x="0" y="0"/>
+          <a:chExt cx="0" cy="0"/>
+        </a:xfrm>
+      </p:grpSpPr>
       <p:pic>
         <p:nvPicPr>
           <p:cNvPr id="2" name="Picture 1" descr="AIM_logo_2017.svg.png"/>
@@ -3139,7 +3141,7 @@
           <a:noFill/>
         </p:spPr>
         <p:txBody>
-          <a:bodyPr wrap="square" lIns="0" rIns="0" tIns="0" bIns="0">
+          <a:bodyPr wrap="square" lIns="0" tIns="0" rIns="0" bIns="0">
             <a:spAutoFit/>
           </a:bodyPr>
           <a:lstStyle/>
@@ -3153,13 +3155,22 @@
               </a:spcAft>
             </a:pPr>
             <a:r>
-              <a:rPr sz="3000" b="1" i="0">
+              <a:rPr sz="3000" b="1" i="0" dirty="0" err="1">
                 <a:solidFill>
                   <a:srgbClr val="1A1A1A"/>
                 </a:solidFill>
                 <a:latin typeface="Arial"/>
               </a:rPr>
-              <a:t>FitML: A Fairness-Audited Machine Learning System for Sizing and Augmented Reality Try-On in E-Commerce</a:t>
+              <a:t>FitML</a:t>
+            </a:r>
+            <a:r>
+              <a:rPr sz="3000" b="1" i="0" dirty="0">
+                <a:solidFill>
+                  <a:srgbClr val="1A1A1A"/>
+                </a:solidFill>
+                <a:latin typeface="Arial"/>
+              </a:rPr>
+              <a:t>: A Fairness-Audited Machine Learning System for Sizing and Augmented Reality Try-On in E-Commerce</a:t>
             </a:r>
           </a:p>
         </p:txBody>
@@ -3181,7 +3192,7 @@
           <a:noFill/>
         </p:spPr>
         <p:txBody>
-          <a:bodyPr wrap="square" lIns="0" rIns="0" tIns="0" bIns="0">
+          <a:bodyPr wrap="square" lIns="0" tIns="0" rIns="0" bIns="0">
             <a:spAutoFit/>
           </a:bodyPr>
           <a:lstStyle/>
@@ -3223,7 +3234,7 @@
           <a:noFill/>
         </p:spPr>
         <p:txBody>
-          <a:bodyPr wrap="square" lIns="0" rIns="0" tIns="0" bIns="0">
+          <a:bodyPr wrap="square" lIns="0" tIns="0" rIns="0" bIns="0">
             <a:spAutoFit/>
           </a:bodyPr>
           <a:lstStyle/>
@@ -3265,7 +3276,7 @@
           <a:noFill/>
         </p:spPr>
         <p:txBody>
-          <a:bodyPr wrap="square" lIns="0" rIns="0" tIns="0" bIns="0">
+          <a:bodyPr wrap="square" lIns="0" tIns="0" rIns="0" bIns="0">
             <a:spAutoFit/>
           </a:bodyPr>
           <a:lstStyle/>
@@ -3299,15 +3310,15 @@
         <p:spPr>
           <a:xfrm>
             <a:off x="1097280" y="5047488"/>
-            <a:ext cx="9994392" cy="365760"/>
-          </a:xfrm>
-          <a:prstGeom prst="rect">
-            <a:avLst/>
-          </a:prstGeom>
-          <a:noFill/>
-        </p:spPr>
-        <p:txBody>
-          <a:bodyPr wrap="square" lIns="0" rIns="0" tIns="0" bIns="0">
+            <a:ext cx="9994392" cy="189411"/>
+          </a:xfrm>
+          <a:prstGeom prst="rect">
+            <a:avLst/>
+          </a:prstGeom>
+          <a:noFill/>
+        </p:spPr>
+        <p:txBody>
+          <a:bodyPr wrap="square" lIns="0" tIns="0" rIns="0" bIns="0">
             <a:spAutoFit/>
           </a:bodyPr>
           <a:lstStyle/>
@@ -3321,7 +3332,7 @@
               </a:spcAft>
             </a:pPr>
             <a:r>
-              <a:rPr sz="1250" b="0" i="0">
+              <a:rPr sz="1250" b="0" i="1" dirty="0">
                 <a:solidFill>
                   <a:srgbClr val="595959"/>
                 </a:solidFill>
@@ -3349,7 +3360,7 @@
           <a:noFill/>
         </p:spPr>
         <p:txBody>
-          <a:bodyPr wrap="square" lIns="0" rIns="0" tIns="0" bIns="0">
+          <a:bodyPr wrap="square" lIns="0" tIns="0" rIns="0" bIns="0">
             <a:spAutoFit/>
           </a:bodyPr>
           <a:lstStyle/>
@@ -3383,7 +3394,7 @@
 </file>
 
 <file path=ppt/slides/slide10.xml><?xml version="1.0" encoding="utf-8"?>
-<p:sld xmlns:a="http://schemas.openxmlformats.org/drawingml/2006/main" xmlns:p="http://schemas.openxmlformats.org/presentationml/2006/main" xmlns:r="http://schemas.openxmlformats.org/officeDocument/2006/relationships">
+<p:sld xmlns:a="http://schemas.openxmlformats.org/drawingml/2006/main" xmlns:r="http://schemas.openxmlformats.org/officeDocument/2006/relationships" xmlns:p="http://schemas.openxmlformats.org/presentationml/2006/main">
   <p:cSld>
     <p:spTree>
       <p:nvGrpSpPr>
@@ -3391,7 +3402,14 @@
         <p:cNvGrpSpPr/>
         <p:nvPr/>
       </p:nvGrpSpPr>
-      <p:grpSpPr/>
+      <p:grpSpPr>
+        <a:xfrm>
+          <a:off x="0" y="0"/>
+          <a:ext cx="0" cy="0"/>
+          <a:chOff x="0" y="0"/>
+          <a:chExt cx="0" cy="0"/>
+        </a:xfrm>
+      </p:grpSpPr>
       <p:pic>
         <p:nvPicPr>
           <p:cNvPr id="2" name="Picture 1" descr="AIM_logo_2017.svg.png"/>
@@ -3433,7 +3451,7 @@
           <a:noFill/>
         </p:spPr>
         <p:txBody>
-          <a:bodyPr wrap="square" lIns="0" rIns="0" tIns="0" bIns="0">
+          <a:bodyPr wrap="square" lIns="0" tIns="0" rIns="0" bIns="0">
             <a:spAutoFit/>
           </a:bodyPr>
           <a:lstStyle/>
@@ -3503,6 +3521,7 @@
           <a:lstStyle/>
           <a:p>
             <a:pPr algn="ctr"/>
+            <a:endParaRPr/>
           </a:p>
         </p:txBody>
       </p:sp>
@@ -3523,7 +3542,7 @@
           <a:noFill/>
         </p:spPr>
         <p:txBody>
-          <a:bodyPr wrap="square" lIns="0" rIns="0" tIns="0" bIns="0">
+          <a:bodyPr wrap="square" lIns="0" tIns="0" rIns="0" bIns="0">
             <a:spAutoFit/>
           </a:bodyPr>
           <a:lstStyle/>
@@ -3565,7 +3584,7 @@
           <a:noFill/>
         </p:spPr>
         <p:txBody>
-          <a:bodyPr wrap="square" lIns="0" rIns="0" tIns="0" bIns="0">
+          <a:bodyPr wrap="square" lIns="0" tIns="0" rIns="0" bIns="0">
             <a:spAutoFit/>
           </a:bodyPr>
           <a:lstStyle/>
@@ -3654,6 +3673,7 @@
           <a:lstStyle/>
           <a:p>
             <a:pPr algn="ctr"/>
+            <a:endParaRPr/>
           </a:p>
         </p:txBody>
       </p:sp>
@@ -3674,7 +3694,7 @@
           <a:noFill/>
         </p:spPr>
         <p:txBody>
-          <a:bodyPr wrap="square" lIns="0" rIns="0" tIns="0" bIns="0">
+          <a:bodyPr wrap="square" lIns="0" tIns="0" rIns="0" bIns="0">
             <a:spAutoFit/>
           </a:bodyPr>
           <a:lstStyle/>
@@ -3716,7 +3736,7 @@
           <a:noFill/>
         </p:spPr>
         <p:txBody>
-          <a:bodyPr wrap="square" lIns="0" rIns="0" tIns="0" bIns="0">
+          <a:bodyPr wrap="square" lIns="0" tIns="0" rIns="0" bIns="0">
             <a:spAutoFit/>
           </a:bodyPr>
           <a:lstStyle/>
@@ -3777,7 +3797,7 @@
           <a:noFill/>
         </p:spPr>
         <p:txBody>
-          <a:bodyPr wrap="square" lIns="0" rIns="0" tIns="0" bIns="0">
+          <a:bodyPr wrap="square" lIns="0" tIns="0" rIns="0" bIns="0">
             <a:spAutoFit/>
           </a:bodyPr>
           <a:lstStyle/>
@@ -3819,7 +3839,7 @@
           <a:noFill/>
         </p:spPr>
         <p:txBody>
-          <a:bodyPr wrap="square" lIns="0" rIns="0" tIns="0" bIns="0">
+          <a:bodyPr wrap="square" lIns="0" tIns="0" rIns="0" bIns="0">
             <a:spAutoFit/>
           </a:bodyPr>
           <a:lstStyle/>
@@ -3861,7 +3881,7 @@
           <a:noFill/>
         </p:spPr>
         <p:txBody>
-          <a:bodyPr wrap="square" lIns="0" rIns="0" tIns="0" bIns="0">
+          <a:bodyPr wrap="square" lIns="0" tIns="0" rIns="0" bIns="0">
             <a:spAutoFit/>
           </a:bodyPr>
           <a:lstStyle/>
@@ -3912,7 +3932,7 @@
           <a:noFill/>
         </p:spPr>
         <p:txBody>
-          <a:bodyPr wrap="square" lIns="0" rIns="0" tIns="0" bIns="0">
+          <a:bodyPr wrap="square" lIns="0" tIns="0" rIns="0" bIns="0">
             <a:spAutoFit/>
           </a:bodyPr>
           <a:lstStyle/>
@@ -3954,7 +3974,7 @@
           <a:noFill/>
         </p:spPr>
         <p:txBody>
-          <a:bodyPr wrap="square" lIns="0" rIns="0" tIns="0" bIns="0">
+          <a:bodyPr wrap="square" lIns="0" tIns="0" rIns="0" bIns="0">
             <a:spAutoFit/>
           </a:bodyPr>
           <a:lstStyle/>
@@ -4005,7 +4025,7 @@
           <a:noFill/>
         </p:spPr>
         <p:txBody>
-          <a:bodyPr wrap="square" lIns="0" rIns="0" tIns="0" bIns="0">
+          <a:bodyPr wrap="square" lIns="0" tIns="0" rIns="0" bIns="0">
             <a:spAutoFit/>
           </a:bodyPr>
           <a:lstStyle/>
@@ -4047,7 +4067,7 @@
           <a:noFill/>
         </p:spPr>
         <p:txBody>
-          <a:bodyPr wrap="square" lIns="0" rIns="0" tIns="0" bIns="0">
+          <a:bodyPr wrap="square" lIns="0" tIns="0" rIns="0" bIns="0">
             <a:spAutoFit/>
           </a:bodyPr>
           <a:lstStyle/>
@@ -4098,7 +4118,7 @@
           <a:noFill/>
         </p:spPr>
         <p:txBody>
-          <a:bodyPr wrap="square" lIns="0" rIns="0" tIns="0" bIns="0">
+          <a:bodyPr wrap="square" lIns="0" tIns="0" rIns="0" bIns="0">
             <a:spAutoFit/>
           </a:bodyPr>
           <a:lstStyle/>
@@ -4132,7 +4152,7 @@
 </file>
 
 <file path=ppt/slides/slide11.xml><?xml version="1.0" encoding="utf-8"?>
-<p:sld xmlns:a="http://schemas.openxmlformats.org/drawingml/2006/main" xmlns:p="http://schemas.openxmlformats.org/presentationml/2006/main" xmlns:r="http://schemas.openxmlformats.org/officeDocument/2006/relationships">
+<p:sld xmlns:a="http://schemas.openxmlformats.org/drawingml/2006/main" xmlns:r="http://schemas.openxmlformats.org/officeDocument/2006/relationships" xmlns:p="http://schemas.openxmlformats.org/presentationml/2006/main">
   <p:cSld>
     <p:spTree>
       <p:nvGrpSpPr>
@@ -4140,7 +4160,14 @@
         <p:cNvGrpSpPr/>
         <p:nvPr/>
       </p:nvGrpSpPr>
-      <p:grpSpPr/>
+      <p:grpSpPr>
+        <a:xfrm>
+          <a:off x="0" y="0"/>
+          <a:ext cx="0" cy="0"/>
+          <a:chOff x="0" y="0"/>
+          <a:chExt cx="0" cy="0"/>
+        </a:xfrm>
+      </p:grpSpPr>
       <p:pic>
         <p:nvPicPr>
           <p:cNvPr id="2" name="Picture 1" descr="AIM_logo_2017.svg.png"/>
@@ -4182,7 +4209,7 @@
           <a:noFill/>
         </p:spPr>
         <p:txBody>
-          <a:bodyPr wrap="square" lIns="0" rIns="0" tIns="0" bIns="0">
+          <a:bodyPr wrap="square" lIns="0" tIns="0" rIns="0" bIns="0">
             <a:spAutoFit/>
           </a:bodyPr>
           <a:lstStyle/>
@@ -4224,7 +4251,7 @@
           <a:noFill/>
         </p:spPr>
         <p:txBody>
-          <a:bodyPr wrap="square" lIns="0" rIns="0" tIns="0" bIns="0">
+          <a:bodyPr wrap="square" lIns="0" tIns="0" rIns="0" bIns="0">
             <a:spAutoFit/>
           </a:bodyPr>
           <a:lstStyle/>
@@ -4266,7 +4293,7 @@
           <a:noFill/>
         </p:spPr>
         <p:txBody>
-          <a:bodyPr wrap="square" lIns="0" rIns="0" tIns="0" bIns="0">
+          <a:bodyPr wrap="square" lIns="0" tIns="0" rIns="0" bIns="0">
             <a:spAutoFit/>
           </a:bodyPr>
           <a:lstStyle/>
@@ -4308,7 +4335,7 @@
           <a:noFill/>
         </p:spPr>
         <p:txBody>
-          <a:bodyPr wrap="square" lIns="0" rIns="0" tIns="0" bIns="0">
+          <a:bodyPr wrap="square" lIns="0" tIns="0" rIns="0" bIns="0">
             <a:spAutoFit/>
           </a:bodyPr>
           <a:lstStyle/>
@@ -4359,7 +4386,7 @@
           <a:noFill/>
         </p:spPr>
         <p:txBody>
-          <a:bodyPr wrap="square" lIns="0" rIns="0" tIns="0" bIns="0">
+          <a:bodyPr wrap="square" lIns="0" tIns="0" rIns="0" bIns="0">
             <a:spAutoFit/>
           </a:bodyPr>
           <a:lstStyle/>
@@ -4401,7 +4428,7 @@
           <a:noFill/>
         </p:spPr>
         <p:txBody>
-          <a:bodyPr wrap="square" lIns="0" rIns="0" tIns="0" bIns="0">
+          <a:bodyPr wrap="square" lIns="0" tIns="0" rIns="0" bIns="0">
             <a:spAutoFit/>
           </a:bodyPr>
           <a:lstStyle/>
@@ -4443,7 +4470,7 @@
           <a:noFill/>
         </p:spPr>
         <p:txBody>
-          <a:bodyPr wrap="square" lIns="0" rIns="0" tIns="0" bIns="0">
+          <a:bodyPr wrap="square" lIns="0" tIns="0" rIns="0" bIns="0">
             <a:spAutoFit/>
           </a:bodyPr>
           <a:lstStyle/>
@@ -4485,7 +4512,7 @@
           <a:noFill/>
         </p:spPr>
         <p:txBody>
-          <a:bodyPr wrap="square" lIns="0" rIns="0" tIns="0" bIns="0">
+          <a:bodyPr wrap="square" lIns="0" tIns="0" rIns="0" bIns="0">
             <a:spAutoFit/>
           </a:bodyPr>
           <a:lstStyle/>
@@ -4527,7 +4554,7 @@
           <a:noFill/>
         </p:spPr>
         <p:txBody>
-          <a:bodyPr wrap="square" lIns="0" rIns="0" tIns="0" bIns="0">
+          <a:bodyPr wrap="square" lIns="0" tIns="0" rIns="0" bIns="0">
             <a:spAutoFit/>
           </a:bodyPr>
           <a:lstStyle/>
@@ -4569,7 +4596,7 @@
           <a:noFill/>
         </p:spPr>
         <p:txBody>
-          <a:bodyPr wrap="square" lIns="0" rIns="0" tIns="0" bIns="0">
+          <a:bodyPr wrap="square" lIns="0" tIns="0" rIns="0" bIns="0">
             <a:spAutoFit/>
           </a:bodyPr>
           <a:lstStyle/>
@@ -4611,7 +4638,7 @@
           <a:noFill/>
         </p:spPr>
         <p:txBody>
-          <a:bodyPr wrap="square" lIns="0" rIns="0" tIns="0" bIns="0">
+          <a:bodyPr wrap="square" lIns="0" tIns="0" rIns="0" bIns="0">
             <a:spAutoFit/>
           </a:bodyPr>
           <a:lstStyle/>
@@ -4653,7 +4680,7 @@
           <a:noFill/>
         </p:spPr>
         <p:txBody>
-          <a:bodyPr wrap="square" lIns="0" rIns="0" tIns="0" bIns="0">
+          <a:bodyPr wrap="square" lIns="0" tIns="0" rIns="0" bIns="0">
             <a:spAutoFit/>
           </a:bodyPr>
           <a:lstStyle/>
@@ -4695,7 +4722,7 @@
           <a:noFill/>
         </p:spPr>
         <p:txBody>
-          <a:bodyPr wrap="square" lIns="0" rIns="0" tIns="0" bIns="0">
+          <a:bodyPr wrap="square" lIns="0" tIns="0" rIns="0" bIns="0">
             <a:spAutoFit/>
           </a:bodyPr>
           <a:lstStyle/>
@@ -4737,7 +4764,7 @@
           <a:noFill/>
         </p:spPr>
         <p:txBody>
-          <a:bodyPr wrap="square" lIns="0" rIns="0" tIns="0" bIns="0">
+          <a:bodyPr wrap="square" lIns="0" tIns="0" rIns="0" bIns="0">
             <a:spAutoFit/>
           </a:bodyPr>
           <a:lstStyle/>
@@ -4779,7 +4806,7 @@
           <a:noFill/>
         </p:spPr>
         <p:txBody>
-          <a:bodyPr wrap="square" lIns="0" rIns="0" tIns="0" bIns="0">
+          <a:bodyPr wrap="square" lIns="0" tIns="0" rIns="0" bIns="0">
             <a:spAutoFit/>
           </a:bodyPr>
           <a:lstStyle/>
@@ -4830,7 +4857,7 @@
           <a:noFill/>
         </p:spPr>
         <p:txBody>
-          <a:bodyPr wrap="square" lIns="0" rIns="0" tIns="0" bIns="0">
+          <a:bodyPr wrap="square" lIns="0" tIns="0" rIns="0" bIns="0">
             <a:spAutoFit/>
           </a:bodyPr>
           <a:lstStyle/>
@@ -4872,7 +4899,7 @@
           <a:noFill/>
         </p:spPr>
         <p:txBody>
-          <a:bodyPr wrap="square" lIns="0" rIns="0" tIns="0" bIns="0">
+          <a:bodyPr wrap="square" lIns="0" tIns="0" rIns="0" bIns="0">
             <a:spAutoFit/>
           </a:bodyPr>
           <a:lstStyle/>
@@ -4923,7 +4950,7 @@
           <a:noFill/>
         </p:spPr>
         <p:txBody>
-          <a:bodyPr wrap="square" lIns="0" rIns="0" tIns="0" bIns="0">
+          <a:bodyPr wrap="square" lIns="0" tIns="0" rIns="0" bIns="0">
             <a:spAutoFit/>
           </a:bodyPr>
           <a:lstStyle/>
@@ -4965,7 +4992,7 @@
           <a:noFill/>
         </p:spPr>
         <p:txBody>
-          <a:bodyPr wrap="square" lIns="0" rIns="0" tIns="0" bIns="0">
+          <a:bodyPr wrap="square" lIns="0" tIns="0" rIns="0" bIns="0">
             <a:spAutoFit/>
           </a:bodyPr>
           <a:lstStyle/>
@@ -5016,7 +5043,7 @@
           <a:noFill/>
         </p:spPr>
         <p:txBody>
-          <a:bodyPr wrap="square" lIns="0" rIns="0" tIns="0" bIns="0">
+          <a:bodyPr wrap="square" lIns="0" tIns="0" rIns="0" bIns="0">
             <a:spAutoFit/>
           </a:bodyPr>
           <a:lstStyle/>
@@ -5058,7 +5085,7 @@
           <a:noFill/>
         </p:spPr>
         <p:txBody>
-          <a:bodyPr wrap="square" lIns="0" rIns="0" tIns="0" bIns="0">
+          <a:bodyPr wrap="square" lIns="0" tIns="0" rIns="0" bIns="0">
             <a:spAutoFit/>
           </a:bodyPr>
           <a:lstStyle/>
@@ -5109,7 +5136,7 @@
           <a:noFill/>
         </p:spPr>
         <p:txBody>
-          <a:bodyPr wrap="square" lIns="0" rIns="0" tIns="0" bIns="0">
+          <a:bodyPr wrap="square" lIns="0" tIns="0" rIns="0" bIns="0">
             <a:spAutoFit/>
           </a:bodyPr>
           <a:lstStyle/>
@@ -5151,7 +5178,7 @@
           <a:noFill/>
         </p:spPr>
         <p:txBody>
-          <a:bodyPr wrap="square" lIns="0" rIns="0" tIns="0" bIns="0">
+          <a:bodyPr wrap="square" lIns="0" tIns="0" rIns="0" bIns="0">
             <a:spAutoFit/>
           </a:bodyPr>
           <a:lstStyle/>
@@ -5238,7 +5265,7 @@
           <a:noFill/>
         </p:spPr>
         <p:txBody>
-          <a:bodyPr wrap="square" lIns="0" rIns="0" tIns="0" bIns="0">
+          <a:bodyPr wrap="square" lIns="0" tIns="0" rIns="0" bIns="0">
             <a:spAutoFit/>
           </a:bodyPr>
           <a:lstStyle/>
@@ -5317,7 +5344,7 @@
 </file>
 
 <file path=ppt/slides/slide2.xml><?xml version="1.0" encoding="utf-8"?>
-<p:sld xmlns:a="http://schemas.openxmlformats.org/drawingml/2006/main" xmlns:p="http://schemas.openxmlformats.org/presentationml/2006/main" xmlns:r="http://schemas.openxmlformats.org/officeDocument/2006/relationships">
+<p:sld xmlns:a="http://schemas.openxmlformats.org/drawingml/2006/main" xmlns:r="http://schemas.openxmlformats.org/officeDocument/2006/relationships" xmlns:p="http://schemas.openxmlformats.org/presentationml/2006/main">
   <p:cSld>
     <p:spTree>
       <p:nvGrpSpPr>
@@ -5325,7 +5352,14 @@
         <p:cNvGrpSpPr/>
         <p:nvPr/>
       </p:nvGrpSpPr>
-      <p:grpSpPr/>
+      <p:grpSpPr>
+        <a:xfrm>
+          <a:off x="0" y="0"/>
+          <a:ext cx="0" cy="0"/>
+          <a:chOff x="0" y="0"/>
+          <a:chExt cx="0" cy="0"/>
+        </a:xfrm>
+      </p:grpSpPr>
       <p:pic>
         <p:nvPicPr>
           <p:cNvPr id="2" name="Picture 1" descr="AIM_logo_2017.svg.png"/>
@@ -5367,7 +5401,7 @@
           <a:noFill/>
         </p:spPr>
         <p:txBody>
-          <a:bodyPr wrap="square" lIns="0" rIns="0" tIns="0" bIns="0">
+          <a:bodyPr wrap="square" lIns="0" tIns="0" rIns="0" bIns="0">
             <a:spAutoFit/>
           </a:bodyPr>
           <a:lstStyle/>
@@ -5409,7 +5443,7 @@
           <a:noFill/>
         </p:spPr>
         <p:txBody>
-          <a:bodyPr wrap="square" lIns="0" rIns="0" tIns="0" bIns="0">
+          <a:bodyPr wrap="square" lIns="0" tIns="0" rIns="0" bIns="0">
             <a:spAutoFit/>
           </a:bodyPr>
           <a:lstStyle/>
@@ -5451,7 +5485,7 @@
           <a:noFill/>
         </p:spPr>
         <p:txBody>
-          <a:bodyPr wrap="square" lIns="0" rIns="0" tIns="0" bIns="0">
+          <a:bodyPr wrap="square" lIns="0" tIns="0" rIns="0" bIns="0">
             <a:spAutoFit/>
           </a:bodyPr>
           <a:lstStyle/>
@@ -5493,7 +5527,7 @@
           <a:noFill/>
         </p:spPr>
         <p:txBody>
-          <a:bodyPr wrap="square" lIns="0" rIns="0" tIns="0" bIns="0">
+          <a:bodyPr wrap="square" lIns="0" tIns="0" rIns="0" bIns="0">
             <a:spAutoFit/>
           </a:bodyPr>
           <a:lstStyle/>
@@ -5535,7 +5569,7 @@
           <a:noFill/>
         </p:spPr>
         <p:txBody>
-          <a:bodyPr wrap="square" lIns="0" rIns="0" tIns="0" bIns="0">
+          <a:bodyPr wrap="square" lIns="0" tIns="0" rIns="0" bIns="0">
             <a:spAutoFit/>
           </a:bodyPr>
           <a:lstStyle/>
@@ -5577,7 +5611,7 @@
           <a:noFill/>
         </p:spPr>
         <p:txBody>
-          <a:bodyPr wrap="square" lIns="0" rIns="0" tIns="0" bIns="0">
+          <a:bodyPr wrap="square" lIns="0" tIns="0" rIns="0" bIns="0">
             <a:spAutoFit/>
           </a:bodyPr>
           <a:lstStyle/>
@@ -5619,7 +5653,7 @@
           <a:noFill/>
         </p:spPr>
         <p:txBody>
-          <a:bodyPr wrap="square" lIns="0" rIns="0" tIns="0" bIns="0">
+          <a:bodyPr wrap="square" lIns="0" tIns="0" rIns="0" bIns="0">
             <a:spAutoFit/>
           </a:bodyPr>
           <a:lstStyle/>
@@ -5697,7 +5731,7 @@
           <a:noFill/>
         </p:spPr>
         <p:txBody>
-          <a:bodyPr wrap="square" lIns="0" rIns="0" tIns="0" bIns="0">
+          <a:bodyPr wrap="square" lIns="0" tIns="0" rIns="0" bIns="0">
             <a:spAutoFit/>
           </a:bodyPr>
           <a:lstStyle/>
@@ -5739,7 +5773,7 @@
           <a:noFill/>
         </p:spPr>
         <p:txBody>
-          <a:bodyPr wrap="square" lIns="0" rIns="0" tIns="0" bIns="0">
+          <a:bodyPr wrap="square" lIns="0" tIns="0" rIns="0" bIns="0">
             <a:spAutoFit/>
           </a:bodyPr>
           <a:lstStyle/>
@@ -5781,7 +5815,7 @@
           <a:noFill/>
         </p:spPr>
         <p:txBody>
-          <a:bodyPr wrap="square" lIns="0" rIns="0" tIns="0" bIns="0">
+          <a:bodyPr wrap="square" lIns="0" tIns="0" rIns="0" bIns="0">
             <a:spAutoFit/>
           </a:bodyPr>
           <a:lstStyle/>
@@ -5832,7 +5866,7 @@
           <a:noFill/>
         </p:spPr>
         <p:txBody>
-          <a:bodyPr wrap="square" lIns="0" rIns="0" tIns="0" bIns="0">
+          <a:bodyPr wrap="square" lIns="0" tIns="0" rIns="0" bIns="0">
             <a:spAutoFit/>
           </a:bodyPr>
           <a:lstStyle/>
@@ -5874,7 +5908,7 @@
           <a:noFill/>
         </p:spPr>
         <p:txBody>
-          <a:bodyPr wrap="square" lIns="0" rIns="0" tIns="0" bIns="0">
+          <a:bodyPr wrap="square" lIns="0" tIns="0" rIns="0" bIns="0">
             <a:spAutoFit/>
           </a:bodyPr>
           <a:lstStyle/>
@@ -5925,7 +5959,7 @@
           <a:noFill/>
         </p:spPr>
         <p:txBody>
-          <a:bodyPr wrap="square" lIns="0" rIns="0" tIns="0" bIns="0">
+          <a:bodyPr wrap="square" lIns="0" tIns="0" rIns="0" bIns="0">
             <a:spAutoFit/>
           </a:bodyPr>
           <a:lstStyle/>
@@ -5967,7 +6001,7 @@
           <a:noFill/>
         </p:spPr>
         <p:txBody>
-          <a:bodyPr wrap="square" lIns="0" rIns="0" tIns="0" bIns="0">
+          <a:bodyPr wrap="square" lIns="0" tIns="0" rIns="0" bIns="0">
             <a:spAutoFit/>
           </a:bodyPr>
           <a:lstStyle/>
@@ -6018,7 +6052,7 @@
           <a:noFill/>
         </p:spPr>
         <p:txBody>
-          <a:bodyPr wrap="square" lIns="0" rIns="0" tIns="0" bIns="0">
+          <a:bodyPr wrap="square" lIns="0" tIns="0" rIns="0" bIns="0">
             <a:spAutoFit/>
           </a:bodyPr>
           <a:lstStyle/>
@@ -6060,7 +6094,7 @@
           <a:noFill/>
         </p:spPr>
         <p:txBody>
-          <a:bodyPr wrap="square" lIns="0" rIns="0" tIns="0" bIns="0">
+          <a:bodyPr wrap="square" lIns="0" tIns="0" rIns="0" bIns="0">
             <a:spAutoFit/>
           </a:bodyPr>
           <a:lstStyle/>
@@ -6102,7 +6136,7 @@
           <a:noFill/>
         </p:spPr>
         <p:txBody>
-          <a:bodyPr wrap="square" lIns="0" rIns="0" tIns="0" bIns="0">
+          <a:bodyPr wrap="square" lIns="0" tIns="0" rIns="0" bIns="0">
             <a:spAutoFit/>
           </a:bodyPr>
           <a:lstStyle/>
@@ -6153,7 +6187,7 @@
           <a:noFill/>
         </p:spPr>
         <p:txBody>
-          <a:bodyPr wrap="square" lIns="0" rIns="0" tIns="0" bIns="0">
+          <a:bodyPr wrap="square" lIns="0" tIns="0" rIns="0" bIns="0">
             <a:spAutoFit/>
           </a:bodyPr>
           <a:lstStyle/>
@@ -6195,7 +6229,7 @@
           <a:noFill/>
         </p:spPr>
         <p:txBody>
-          <a:bodyPr wrap="square" lIns="0" rIns="0" tIns="0" bIns="0">
+          <a:bodyPr wrap="square" lIns="0" tIns="0" rIns="0" bIns="0">
             <a:spAutoFit/>
           </a:bodyPr>
           <a:lstStyle/>
@@ -6246,7 +6280,7 @@
           <a:noFill/>
         </p:spPr>
         <p:txBody>
-          <a:bodyPr wrap="square" lIns="0" rIns="0" tIns="0" bIns="0">
+          <a:bodyPr wrap="square" lIns="0" tIns="0" rIns="0" bIns="0">
             <a:spAutoFit/>
           </a:bodyPr>
           <a:lstStyle/>
@@ -6288,7 +6322,7 @@
           <a:noFill/>
         </p:spPr>
         <p:txBody>
-          <a:bodyPr wrap="square" lIns="0" rIns="0" tIns="0" bIns="0">
+          <a:bodyPr wrap="square" lIns="0" tIns="0" rIns="0" bIns="0">
             <a:spAutoFit/>
           </a:bodyPr>
           <a:lstStyle/>
@@ -6339,7 +6373,7 @@
           <a:noFill/>
         </p:spPr>
         <p:txBody>
-          <a:bodyPr wrap="square" lIns="0" rIns="0" tIns="0" bIns="0">
+          <a:bodyPr wrap="square" lIns="0" tIns="0" rIns="0" bIns="0">
             <a:spAutoFit/>
           </a:bodyPr>
           <a:lstStyle/>
@@ -6373,7 +6407,7 @@
 </file>
 
 <file path=ppt/slides/slide3.xml><?xml version="1.0" encoding="utf-8"?>
-<p:sld xmlns:a="http://schemas.openxmlformats.org/drawingml/2006/main" xmlns:p="http://schemas.openxmlformats.org/presentationml/2006/main" xmlns:r="http://schemas.openxmlformats.org/officeDocument/2006/relationships">
+<p:sld xmlns:a="http://schemas.openxmlformats.org/drawingml/2006/main" xmlns:r="http://schemas.openxmlformats.org/officeDocument/2006/relationships" xmlns:p="http://schemas.openxmlformats.org/presentationml/2006/main">
   <p:cSld>
     <p:spTree>
       <p:nvGrpSpPr>
@@ -6381,7 +6415,14 @@
         <p:cNvGrpSpPr/>
         <p:nvPr/>
       </p:nvGrpSpPr>
-      <p:grpSpPr/>
+      <p:grpSpPr>
+        <a:xfrm>
+          <a:off x="0" y="0"/>
+          <a:ext cx="0" cy="0"/>
+          <a:chOff x="0" y="0"/>
+          <a:chExt cx="0" cy="0"/>
+        </a:xfrm>
+      </p:grpSpPr>
       <p:pic>
         <p:nvPicPr>
           <p:cNvPr id="2" name="Picture 1" descr="AIM_logo_2017.svg.png"/>
@@ -6423,7 +6464,7 @@
           <a:noFill/>
         </p:spPr>
         <p:txBody>
-          <a:bodyPr wrap="square" lIns="0" rIns="0" tIns="0" bIns="0">
+          <a:bodyPr wrap="square" lIns="0" tIns="0" rIns="0" bIns="0">
             <a:spAutoFit/>
           </a:bodyPr>
           <a:lstStyle/>
@@ -6465,7 +6506,7 @@
           <a:noFill/>
         </p:spPr>
         <p:txBody>
-          <a:bodyPr wrap="square" lIns="0" rIns="0" tIns="0" bIns="0">
+          <a:bodyPr wrap="square" lIns="0" tIns="0" rIns="0" bIns="0">
             <a:spAutoFit/>
           </a:bodyPr>
           <a:lstStyle/>
@@ -6531,6 +6572,7 @@
           <a:lstStyle/>
           <a:p>
             <a:pPr algn="ctr"/>
+            <a:endParaRPr/>
           </a:p>
         </p:txBody>
       </p:sp>
@@ -6551,7 +6593,7 @@
           <a:noFill/>
         </p:spPr>
         <p:txBody>
-          <a:bodyPr wrap="square" lIns="0" rIns="0" tIns="0" bIns="0">
+          <a:bodyPr wrap="square" lIns="0" tIns="0" rIns="0" bIns="0">
             <a:spAutoFit/>
           </a:bodyPr>
           <a:lstStyle/>
@@ -6564,15 +6606,7 @@
                 <a:spcPts val="0"/>
               </a:spcAft>
             </a:pPr>
-            <a:r>
-              <a:rPr sz="1150" b="1" i="0">
-                <a:solidFill>
-                  <a:srgbClr val="FFFFFF"/>
-                </a:solidFill>
-                <a:latin typeface="Arial"/>
-              </a:rPr>
-              <a:t/>
-            </a:r>
+            <a:endParaRPr/>
           </a:p>
         </p:txBody>
       </p:sp>
@@ -6593,7 +6627,7 @@
           <a:noFill/>
         </p:spPr>
         <p:txBody>
-          <a:bodyPr wrap="square" lIns="0" rIns="0" tIns="0" bIns="0">
+          <a:bodyPr wrap="square" lIns="0" tIns="0" rIns="0" bIns="0">
             <a:spAutoFit/>
           </a:bodyPr>
           <a:lstStyle/>
@@ -6635,7 +6669,7 @@
           <a:noFill/>
         </p:spPr>
         <p:txBody>
-          <a:bodyPr wrap="square" lIns="0" rIns="0" tIns="0" bIns="0">
+          <a:bodyPr wrap="square" lIns="0" tIns="0" rIns="0" bIns="0">
             <a:spAutoFit/>
           </a:bodyPr>
           <a:lstStyle/>
@@ -6701,6 +6735,7 @@
           <a:lstStyle/>
           <a:p>
             <a:pPr algn="ctr"/>
+            <a:endParaRPr/>
           </a:p>
         </p:txBody>
       </p:sp>
@@ -6721,7 +6756,7 @@
           <a:noFill/>
         </p:spPr>
         <p:txBody>
-          <a:bodyPr wrap="square" lIns="0" rIns="0" tIns="0" bIns="0">
+          <a:bodyPr wrap="square" lIns="0" tIns="0" rIns="0" bIns="0">
             <a:spAutoFit/>
           </a:bodyPr>
           <a:lstStyle/>
@@ -6763,7 +6798,7 @@
           <a:noFill/>
         </p:spPr>
         <p:txBody>
-          <a:bodyPr wrap="square" lIns="0" rIns="0" tIns="0" bIns="0">
+          <a:bodyPr wrap="square" lIns="0" tIns="0" rIns="0" bIns="0">
             <a:spAutoFit/>
           </a:bodyPr>
           <a:lstStyle/>
@@ -6805,7 +6840,7 @@
           <a:noFill/>
         </p:spPr>
         <p:txBody>
-          <a:bodyPr wrap="square" lIns="0" rIns="0" tIns="0" bIns="0">
+          <a:bodyPr wrap="square" lIns="0" tIns="0" rIns="0" bIns="0">
             <a:spAutoFit/>
           </a:bodyPr>
           <a:lstStyle/>
@@ -6871,6 +6906,7 @@
           <a:lstStyle/>
           <a:p>
             <a:pPr algn="ctr"/>
+            <a:endParaRPr/>
           </a:p>
         </p:txBody>
       </p:sp>
@@ -6891,7 +6927,7 @@
           <a:noFill/>
         </p:spPr>
         <p:txBody>
-          <a:bodyPr wrap="square" lIns="0" rIns="0" tIns="0" bIns="0">
+          <a:bodyPr wrap="square" lIns="0" tIns="0" rIns="0" bIns="0">
             <a:spAutoFit/>
           </a:bodyPr>
           <a:lstStyle/>
@@ -6933,7 +6969,7 @@
           <a:noFill/>
         </p:spPr>
         <p:txBody>
-          <a:bodyPr wrap="square" lIns="0" rIns="0" tIns="0" bIns="0">
+          <a:bodyPr wrap="square" lIns="0" tIns="0" rIns="0" bIns="0">
             <a:spAutoFit/>
           </a:bodyPr>
           <a:lstStyle/>
@@ -6975,7 +7011,7 @@
           <a:noFill/>
         </p:spPr>
         <p:txBody>
-          <a:bodyPr wrap="square" lIns="0" rIns="0" tIns="0" bIns="0">
+          <a:bodyPr wrap="square" lIns="0" tIns="0" rIns="0" bIns="0">
             <a:spAutoFit/>
           </a:bodyPr>
           <a:lstStyle/>
@@ -7041,6 +7077,7 @@
           <a:lstStyle/>
           <a:p>
             <a:pPr algn="ctr"/>
+            <a:endParaRPr/>
           </a:p>
         </p:txBody>
       </p:sp>
@@ -7061,7 +7098,7 @@
           <a:noFill/>
         </p:spPr>
         <p:txBody>
-          <a:bodyPr wrap="square" lIns="0" rIns="0" tIns="0" bIns="0">
+          <a:bodyPr wrap="square" lIns="0" tIns="0" rIns="0" bIns="0">
             <a:spAutoFit/>
           </a:bodyPr>
           <a:lstStyle/>
@@ -7103,7 +7140,7 @@
           <a:noFill/>
         </p:spPr>
         <p:txBody>
-          <a:bodyPr wrap="square" lIns="0" rIns="0" tIns="0" bIns="0">
+          <a:bodyPr wrap="square" lIns="0" tIns="0" rIns="0" bIns="0">
             <a:spAutoFit/>
           </a:bodyPr>
           <a:lstStyle/>
@@ -7145,7 +7182,7 @@
           <a:noFill/>
         </p:spPr>
         <p:txBody>
-          <a:bodyPr wrap="square" lIns="0" rIns="0" tIns="0" bIns="0">
+          <a:bodyPr wrap="square" lIns="0" tIns="0" rIns="0" bIns="0">
             <a:spAutoFit/>
           </a:bodyPr>
           <a:lstStyle/>
@@ -7211,6 +7248,7 @@
           <a:lstStyle/>
           <a:p>
             <a:pPr algn="ctr"/>
+            <a:endParaRPr/>
           </a:p>
         </p:txBody>
       </p:sp>
@@ -7231,7 +7269,7 @@
           <a:noFill/>
         </p:spPr>
         <p:txBody>
-          <a:bodyPr wrap="square" lIns="0" rIns="0" tIns="0" bIns="0">
+          <a:bodyPr wrap="square" lIns="0" tIns="0" rIns="0" bIns="0">
             <a:spAutoFit/>
           </a:bodyPr>
           <a:lstStyle/>
@@ -7273,7 +7311,7 @@
           <a:noFill/>
         </p:spPr>
         <p:txBody>
-          <a:bodyPr wrap="square" lIns="0" rIns="0" tIns="0" bIns="0">
+          <a:bodyPr wrap="square" lIns="0" tIns="0" rIns="0" bIns="0">
             <a:spAutoFit/>
           </a:bodyPr>
           <a:lstStyle/>
@@ -7315,7 +7353,7 @@
           <a:noFill/>
         </p:spPr>
         <p:txBody>
-          <a:bodyPr wrap="square" lIns="0" rIns="0" tIns="0" bIns="0">
+          <a:bodyPr wrap="square" lIns="0" tIns="0" rIns="0" bIns="0">
             <a:spAutoFit/>
           </a:bodyPr>
           <a:lstStyle/>
@@ -7465,7 +7503,7 @@
           <a:noFill/>
         </p:spPr>
         <p:txBody>
-          <a:bodyPr wrap="square" lIns="0" rIns="0" tIns="0" bIns="0">
+          <a:bodyPr wrap="square" lIns="0" tIns="0" rIns="0" bIns="0">
             <a:spAutoFit/>
           </a:bodyPr>
           <a:lstStyle/>
@@ -7516,7 +7554,7 @@
           <a:noFill/>
         </p:spPr>
         <p:txBody>
-          <a:bodyPr wrap="square" lIns="0" rIns="0" tIns="0" bIns="0">
+          <a:bodyPr wrap="square" lIns="0" tIns="0" rIns="0" bIns="0">
             <a:spAutoFit/>
           </a:bodyPr>
           <a:lstStyle/>
@@ -7558,7 +7596,7 @@
           <a:noFill/>
         </p:spPr>
         <p:txBody>
-          <a:bodyPr wrap="square" lIns="0" rIns="0" tIns="0" bIns="0">
+          <a:bodyPr wrap="square" lIns="0" tIns="0" rIns="0" bIns="0">
             <a:spAutoFit/>
           </a:bodyPr>
           <a:lstStyle/>
@@ -7600,7 +7638,7 @@
           <a:noFill/>
         </p:spPr>
         <p:txBody>
-          <a:bodyPr wrap="square" lIns="0" rIns="0" tIns="0" bIns="0">
+          <a:bodyPr wrap="square" lIns="0" tIns="0" rIns="0" bIns="0">
             <a:spAutoFit/>
           </a:bodyPr>
           <a:lstStyle/>
@@ -7666,6 +7704,7 @@
           <a:lstStyle/>
           <a:p>
             <a:pPr algn="ctr"/>
+            <a:endParaRPr/>
           </a:p>
         </p:txBody>
       </p:sp>
@@ -7686,7 +7725,7 @@
           <a:noFill/>
         </p:spPr>
         <p:txBody>
-          <a:bodyPr wrap="square" lIns="0" rIns="0" tIns="0" bIns="0">
+          <a:bodyPr wrap="square" lIns="0" tIns="0" rIns="0" bIns="0">
             <a:spAutoFit/>
           </a:bodyPr>
           <a:lstStyle/>
@@ -7728,7 +7767,7 @@
           <a:noFill/>
         </p:spPr>
         <p:txBody>
-          <a:bodyPr wrap="square" lIns="0" rIns="0" tIns="0" bIns="0">
+          <a:bodyPr wrap="square" lIns="0" tIns="0" rIns="0" bIns="0">
             <a:spAutoFit/>
           </a:bodyPr>
           <a:lstStyle/>
@@ -7794,6 +7833,7 @@
           <a:lstStyle/>
           <a:p>
             <a:pPr algn="ctr"/>
+            <a:endParaRPr/>
           </a:p>
         </p:txBody>
       </p:sp>
@@ -7814,7 +7854,7 @@
           <a:noFill/>
         </p:spPr>
         <p:txBody>
-          <a:bodyPr wrap="square" lIns="0" rIns="0" tIns="0" bIns="0">
+          <a:bodyPr wrap="square" lIns="0" tIns="0" rIns="0" bIns="0">
             <a:spAutoFit/>
           </a:bodyPr>
           <a:lstStyle/>
@@ -7856,7 +7896,7 @@
           <a:noFill/>
         </p:spPr>
         <p:txBody>
-          <a:bodyPr wrap="square" lIns="0" rIns="0" tIns="0" bIns="0">
+          <a:bodyPr wrap="square" lIns="0" tIns="0" rIns="0" bIns="0">
             <a:spAutoFit/>
           </a:bodyPr>
           <a:lstStyle/>
@@ -7922,6 +7962,7 @@
           <a:lstStyle/>
           <a:p>
             <a:pPr algn="ctr"/>
+            <a:endParaRPr/>
           </a:p>
         </p:txBody>
       </p:sp>
@@ -7942,7 +7983,7 @@
           <a:noFill/>
         </p:spPr>
         <p:txBody>
-          <a:bodyPr wrap="square" lIns="0" rIns="0" tIns="0" bIns="0">
+          <a:bodyPr wrap="square" lIns="0" tIns="0" rIns="0" bIns="0">
             <a:spAutoFit/>
           </a:bodyPr>
           <a:lstStyle/>
@@ -7984,7 +8025,7 @@
           <a:noFill/>
         </p:spPr>
         <p:txBody>
-          <a:bodyPr wrap="square" lIns="0" rIns="0" tIns="0" bIns="0">
+          <a:bodyPr wrap="square" lIns="0" tIns="0" rIns="0" bIns="0">
             <a:spAutoFit/>
           </a:bodyPr>
           <a:lstStyle/>
@@ -8026,7 +8067,7 @@
           <a:noFill/>
         </p:spPr>
         <p:txBody>
-          <a:bodyPr wrap="square" lIns="0" rIns="0" tIns="0" bIns="0">
+          <a:bodyPr wrap="square" lIns="0" tIns="0" rIns="0" bIns="0">
             <a:spAutoFit/>
           </a:bodyPr>
           <a:lstStyle/>
@@ -8068,7 +8109,7 @@
           <a:noFill/>
         </p:spPr>
         <p:txBody>
-          <a:bodyPr wrap="square" lIns="0" rIns="0" tIns="0" bIns="0">
+          <a:bodyPr wrap="square" lIns="0" tIns="0" rIns="0" bIns="0">
             <a:spAutoFit/>
           </a:bodyPr>
           <a:lstStyle/>
@@ -8102,7 +8143,7 @@
 </file>
 
 <file path=ppt/slides/slide4.xml><?xml version="1.0" encoding="utf-8"?>
-<p:sld xmlns:a="http://schemas.openxmlformats.org/drawingml/2006/main" xmlns:p="http://schemas.openxmlformats.org/presentationml/2006/main" xmlns:r="http://schemas.openxmlformats.org/officeDocument/2006/relationships">
+<p:sld xmlns:a="http://schemas.openxmlformats.org/drawingml/2006/main" xmlns:r="http://schemas.openxmlformats.org/officeDocument/2006/relationships" xmlns:p="http://schemas.openxmlformats.org/presentationml/2006/main">
   <p:cSld>
     <p:spTree>
       <p:nvGrpSpPr>
@@ -8110,7 +8151,14 @@
         <p:cNvGrpSpPr/>
         <p:nvPr/>
       </p:nvGrpSpPr>
-      <p:grpSpPr/>
+      <p:grpSpPr>
+        <a:xfrm>
+          <a:off x="0" y="0"/>
+          <a:ext cx="0" cy="0"/>
+          <a:chOff x="0" y="0"/>
+          <a:chExt cx="0" cy="0"/>
+        </a:xfrm>
+      </p:grpSpPr>
       <p:pic>
         <p:nvPicPr>
           <p:cNvPr id="2" name="Picture 1" descr="AIM_logo_2017.svg.png"/>
@@ -8152,7 +8200,7 @@
           <a:noFill/>
         </p:spPr>
         <p:txBody>
-          <a:bodyPr wrap="square" lIns="0" rIns="0" tIns="0" bIns="0">
+          <a:bodyPr wrap="square" lIns="0" tIns="0" rIns="0" bIns="0">
             <a:spAutoFit/>
           </a:bodyPr>
           <a:lstStyle/>
@@ -8194,7 +8242,7 @@
           <a:noFill/>
         </p:spPr>
         <p:txBody>
-          <a:bodyPr wrap="square" lIns="0" rIns="0" tIns="0" bIns="0">
+          <a:bodyPr wrap="square" lIns="0" tIns="0" rIns="0" bIns="0">
             <a:spAutoFit/>
           </a:bodyPr>
           <a:lstStyle/>
@@ -8264,6 +8312,7 @@
           <a:lstStyle/>
           <a:p>
             <a:pPr algn="ctr"/>
+            <a:endParaRPr/>
           </a:p>
         </p:txBody>
       </p:sp>
@@ -8284,7 +8333,7 @@
           <a:noFill/>
         </p:spPr>
         <p:txBody>
-          <a:bodyPr wrap="square" lIns="0" rIns="0" tIns="0" bIns="0">
+          <a:bodyPr wrap="square" lIns="0" tIns="0" rIns="0" bIns="0">
             <a:spAutoFit/>
           </a:bodyPr>
           <a:lstStyle/>
@@ -8326,7 +8375,7 @@
           <a:noFill/>
         </p:spPr>
         <p:txBody>
-          <a:bodyPr wrap="square" lIns="0" rIns="0" tIns="0" bIns="0">
+          <a:bodyPr wrap="square" lIns="0" tIns="0" rIns="0" bIns="0">
             <a:spAutoFit/>
           </a:bodyPr>
           <a:lstStyle/>
@@ -8396,6 +8445,7 @@
           <a:lstStyle/>
           <a:p>
             <a:pPr algn="ctr"/>
+            <a:endParaRPr/>
           </a:p>
         </p:txBody>
       </p:sp>
@@ -8416,7 +8466,7 @@
           <a:noFill/>
         </p:spPr>
         <p:txBody>
-          <a:bodyPr wrap="square" lIns="0" rIns="0" tIns="0" bIns="0">
+          <a:bodyPr wrap="square" lIns="0" tIns="0" rIns="0" bIns="0">
             <a:spAutoFit/>
           </a:bodyPr>
           <a:lstStyle/>
@@ -8458,7 +8508,7 @@
           <a:noFill/>
         </p:spPr>
         <p:txBody>
-          <a:bodyPr wrap="square" lIns="0" rIns="0" tIns="0" bIns="0">
+          <a:bodyPr wrap="square" lIns="0" tIns="0" rIns="0" bIns="0">
             <a:spAutoFit/>
           </a:bodyPr>
           <a:lstStyle/>
@@ -8528,6 +8578,7 @@
           <a:lstStyle/>
           <a:p>
             <a:pPr algn="ctr"/>
+            <a:endParaRPr/>
           </a:p>
         </p:txBody>
       </p:sp>
@@ -8548,7 +8599,7 @@
           <a:noFill/>
         </p:spPr>
         <p:txBody>
-          <a:bodyPr wrap="square" lIns="0" rIns="0" tIns="0" bIns="0">
+          <a:bodyPr wrap="square" lIns="0" tIns="0" rIns="0" bIns="0">
             <a:spAutoFit/>
           </a:bodyPr>
           <a:lstStyle/>
@@ -8590,7 +8641,7 @@
           <a:noFill/>
         </p:spPr>
         <p:txBody>
-          <a:bodyPr wrap="square" lIns="0" rIns="0" tIns="0" bIns="0">
+          <a:bodyPr wrap="square" lIns="0" tIns="0" rIns="0" bIns="0">
             <a:spAutoFit/>
           </a:bodyPr>
           <a:lstStyle/>
@@ -8660,6 +8711,7 @@
           <a:lstStyle/>
           <a:p>
             <a:pPr algn="ctr"/>
+            <a:endParaRPr/>
           </a:p>
         </p:txBody>
       </p:sp>
@@ -8680,7 +8732,7 @@
           <a:noFill/>
         </p:spPr>
         <p:txBody>
-          <a:bodyPr wrap="square" lIns="0" rIns="0" tIns="0" bIns="0">
+          <a:bodyPr wrap="square" lIns="0" tIns="0" rIns="0" bIns="0">
             <a:spAutoFit/>
           </a:bodyPr>
           <a:lstStyle/>
@@ -8722,7 +8774,7 @@
           <a:noFill/>
         </p:spPr>
         <p:txBody>
-          <a:bodyPr wrap="square" lIns="0" rIns="0" tIns="0" bIns="0">
+          <a:bodyPr wrap="square" lIns="0" tIns="0" rIns="0" bIns="0">
             <a:spAutoFit/>
           </a:bodyPr>
           <a:lstStyle/>
@@ -8764,7 +8816,7 @@
           <a:noFill/>
         </p:spPr>
         <p:txBody>
-          <a:bodyPr wrap="square" lIns="0" rIns="0" tIns="0" bIns="0">
+          <a:bodyPr wrap="square" lIns="0" tIns="0" rIns="0" bIns="0">
             <a:spAutoFit/>
           </a:bodyPr>
           <a:lstStyle/>
@@ -8798,7 +8850,7 @@
 </file>
 
 <file path=ppt/slides/slide5.xml><?xml version="1.0" encoding="utf-8"?>
-<p:sld xmlns:a="http://schemas.openxmlformats.org/drawingml/2006/main" xmlns:p="http://schemas.openxmlformats.org/presentationml/2006/main" xmlns:r="http://schemas.openxmlformats.org/officeDocument/2006/relationships">
+<p:sld xmlns:a="http://schemas.openxmlformats.org/drawingml/2006/main" xmlns:r="http://schemas.openxmlformats.org/officeDocument/2006/relationships" xmlns:p="http://schemas.openxmlformats.org/presentationml/2006/main">
   <p:cSld>
     <p:spTree>
       <p:nvGrpSpPr>
@@ -8806,7 +8858,14 @@
         <p:cNvGrpSpPr/>
         <p:nvPr/>
       </p:nvGrpSpPr>
-      <p:grpSpPr/>
+      <p:grpSpPr>
+        <a:xfrm>
+          <a:off x="0" y="0"/>
+          <a:ext cx="0" cy="0"/>
+          <a:chOff x="0" y="0"/>
+          <a:chExt cx="0" cy="0"/>
+        </a:xfrm>
+      </p:grpSpPr>
       <p:pic>
         <p:nvPicPr>
           <p:cNvPr id="2" name="Picture 1" descr="AIM_logo_2017.svg.png"/>
@@ -8848,7 +8907,7 @@
           <a:noFill/>
         </p:spPr>
         <p:txBody>
-          <a:bodyPr wrap="square" lIns="0" rIns="0" tIns="0" bIns="0">
+          <a:bodyPr wrap="square" lIns="0" tIns="0" rIns="0" bIns="0">
             <a:spAutoFit/>
           </a:bodyPr>
           <a:lstStyle/>
@@ -8890,7 +8949,7 @@
           <a:noFill/>
         </p:spPr>
         <p:txBody>
-          <a:bodyPr wrap="square" lIns="0" rIns="0" tIns="0" bIns="0">
+          <a:bodyPr wrap="square" lIns="0" tIns="0" rIns="0" bIns="0">
             <a:spAutoFit/>
           </a:bodyPr>
           <a:lstStyle/>
@@ -8956,6 +9015,7 @@
           <a:lstStyle/>
           <a:p>
             <a:pPr algn="ctr"/>
+            <a:endParaRPr/>
           </a:p>
         </p:txBody>
       </p:sp>
@@ -8976,7 +9036,7 @@
           <a:noFill/>
         </p:spPr>
         <p:txBody>
-          <a:bodyPr wrap="square" lIns="0" rIns="0" tIns="0" bIns="0">
+          <a:bodyPr wrap="square" lIns="0" tIns="0" rIns="0" bIns="0">
             <a:spAutoFit/>
           </a:bodyPr>
           <a:lstStyle/>
@@ -9018,7 +9078,7 @@
           <a:noFill/>
         </p:spPr>
         <p:txBody>
-          <a:bodyPr wrap="square" lIns="0" rIns="0" tIns="0" bIns="0">
+          <a:bodyPr wrap="square" lIns="0" tIns="0" rIns="0" bIns="0">
             <a:spAutoFit/>
           </a:bodyPr>
           <a:lstStyle/>
@@ -9060,7 +9120,7 @@
           <a:noFill/>
         </p:spPr>
         <p:txBody>
-          <a:bodyPr wrap="square" lIns="0" rIns="0" tIns="0" bIns="0">
+          <a:bodyPr wrap="square" lIns="0" tIns="0" rIns="0" bIns="0">
             <a:spAutoFit/>
           </a:bodyPr>
           <a:lstStyle/>
@@ -9102,7 +9162,7 @@
           <a:noFill/>
         </p:spPr>
         <p:txBody>
-          <a:bodyPr wrap="square" lIns="0" rIns="0" tIns="0" bIns="0">
+          <a:bodyPr wrap="square" lIns="0" tIns="0" rIns="0" bIns="0">
             <a:spAutoFit/>
           </a:bodyPr>
           <a:lstStyle/>
@@ -9144,7 +9204,7 @@
           <a:noFill/>
         </p:spPr>
         <p:txBody>
-          <a:bodyPr wrap="square" lIns="0" rIns="0" tIns="0" bIns="0">
+          <a:bodyPr wrap="square" lIns="0" tIns="0" rIns="0" bIns="0">
             <a:spAutoFit/>
           </a:bodyPr>
           <a:lstStyle/>
@@ -9186,7 +9246,7 @@
           <a:noFill/>
         </p:spPr>
         <p:txBody>
-          <a:bodyPr wrap="square" lIns="0" rIns="0" tIns="0" bIns="0">
+          <a:bodyPr wrap="square" lIns="0" tIns="0" rIns="0" bIns="0">
             <a:spAutoFit/>
           </a:bodyPr>
           <a:lstStyle/>
@@ -9252,6 +9312,7 @@
           <a:lstStyle/>
           <a:p>
             <a:pPr algn="ctr"/>
+            <a:endParaRPr/>
           </a:p>
         </p:txBody>
       </p:sp>
@@ -9272,7 +9333,7 @@
           <a:noFill/>
         </p:spPr>
         <p:txBody>
-          <a:bodyPr wrap="square" lIns="0" rIns="0" tIns="0" bIns="0">
+          <a:bodyPr wrap="square" lIns="0" tIns="0" rIns="0" bIns="0">
             <a:spAutoFit/>
           </a:bodyPr>
           <a:lstStyle/>
@@ -9314,7 +9375,7 @@
           <a:noFill/>
         </p:spPr>
         <p:txBody>
-          <a:bodyPr wrap="square" lIns="0" rIns="0" tIns="0" bIns="0">
+          <a:bodyPr wrap="square" lIns="0" tIns="0" rIns="0" bIns="0">
             <a:spAutoFit/>
           </a:bodyPr>
           <a:lstStyle/>
@@ -9356,7 +9417,7 @@
           <a:noFill/>
         </p:spPr>
         <p:txBody>
-          <a:bodyPr wrap="square" lIns="0" rIns="0" tIns="0" bIns="0">
+          <a:bodyPr wrap="square" lIns="0" tIns="0" rIns="0" bIns="0">
             <a:spAutoFit/>
           </a:bodyPr>
           <a:lstStyle/>
@@ -9398,7 +9459,7 @@
           <a:noFill/>
         </p:spPr>
         <p:txBody>
-          <a:bodyPr wrap="square" lIns="0" rIns="0" tIns="0" bIns="0">
+          <a:bodyPr wrap="square" lIns="0" tIns="0" rIns="0" bIns="0">
             <a:spAutoFit/>
           </a:bodyPr>
           <a:lstStyle/>
@@ -9440,7 +9501,7 @@
           <a:noFill/>
         </p:spPr>
         <p:txBody>
-          <a:bodyPr wrap="square" lIns="0" rIns="0" tIns="0" bIns="0">
+          <a:bodyPr wrap="square" lIns="0" tIns="0" rIns="0" bIns="0">
             <a:spAutoFit/>
           </a:bodyPr>
           <a:lstStyle/>
@@ -9482,7 +9543,7 @@
           <a:noFill/>
         </p:spPr>
         <p:txBody>
-          <a:bodyPr wrap="square" lIns="0" rIns="0" tIns="0" bIns="0">
+          <a:bodyPr wrap="square" lIns="0" tIns="0" rIns="0" bIns="0">
             <a:spAutoFit/>
           </a:bodyPr>
           <a:lstStyle/>
@@ -9548,6 +9609,7 @@
           <a:lstStyle/>
           <a:p>
             <a:pPr algn="ctr"/>
+            <a:endParaRPr/>
           </a:p>
         </p:txBody>
       </p:sp>
@@ -9568,7 +9630,7 @@
           <a:noFill/>
         </p:spPr>
         <p:txBody>
-          <a:bodyPr wrap="square" lIns="0" rIns="0" tIns="0" bIns="0">
+          <a:bodyPr wrap="square" lIns="0" tIns="0" rIns="0" bIns="0">
             <a:spAutoFit/>
           </a:bodyPr>
           <a:lstStyle/>
@@ -9610,7 +9672,7 @@
           <a:noFill/>
         </p:spPr>
         <p:txBody>
-          <a:bodyPr wrap="square" lIns="0" rIns="0" tIns="0" bIns="0">
+          <a:bodyPr wrap="square" lIns="0" tIns="0" rIns="0" bIns="0">
             <a:spAutoFit/>
           </a:bodyPr>
           <a:lstStyle/>
@@ -9652,7 +9714,7 @@
           <a:noFill/>
         </p:spPr>
         <p:txBody>
-          <a:bodyPr wrap="square" lIns="0" rIns="0" tIns="0" bIns="0">
+          <a:bodyPr wrap="square" lIns="0" tIns="0" rIns="0" bIns="0">
             <a:spAutoFit/>
           </a:bodyPr>
           <a:lstStyle/>
@@ -9694,7 +9756,7 @@
           <a:noFill/>
         </p:spPr>
         <p:txBody>
-          <a:bodyPr wrap="square" lIns="0" rIns="0" tIns="0" bIns="0">
+          <a:bodyPr wrap="square" lIns="0" tIns="0" rIns="0" bIns="0">
             <a:spAutoFit/>
           </a:bodyPr>
           <a:lstStyle/>
@@ -9736,7 +9798,7 @@
           <a:noFill/>
         </p:spPr>
         <p:txBody>
-          <a:bodyPr wrap="square" lIns="0" rIns="0" tIns="0" bIns="0">
+          <a:bodyPr wrap="square" lIns="0" tIns="0" rIns="0" bIns="0">
             <a:spAutoFit/>
           </a:bodyPr>
           <a:lstStyle/>
@@ -9778,7 +9840,7 @@
           <a:noFill/>
         </p:spPr>
         <p:txBody>
-          <a:bodyPr wrap="square" lIns="0" rIns="0" tIns="0" bIns="0">
+          <a:bodyPr wrap="square" lIns="0" tIns="0" rIns="0" bIns="0">
             <a:spAutoFit/>
           </a:bodyPr>
           <a:lstStyle/>
@@ -9844,6 +9906,7 @@
           <a:lstStyle/>
           <a:p>
             <a:pPr algn="ctr"/>
+            <a:endParaRPr/>
           </a:p>
         </p:txBody>
       </p:sp>
@@ -9864,7 +9927,7 @@
           <a:noFill/>
         </p:spPr>
         <p:txBody>
-          <a:bodyPr wrap="square" lIns="0" rIns="0" tIns="0" bIns="0">
+          <a:bodyPr wrap="square" lIns="0" tIns="0" rIns="0" bIns="0">
             <a:spAutoFit/>
           </a:bodyPr>
           <a:lstStyle/>
@@ -9906,7 +9969,7 @@
           <a:noFill/>
         </p:spPr>
         <p:txBody>
-          <a:bodyPr wrap="square" lIns="0" rIns="0" tIns="0" bIns="0">
+          <a:bodyPr wrap="square" lIns="0" tIns="0" rIns="0" bIns="0">
             <a:spAutoFit/>
           </a:bodyPr>
           <a:lstStyle/>
@@ -9948,7 +10011,7 @@
           <a:noFill/>
         </p:spPr>
         <p:txBody>
-          <a:bodyPr wrap="square" lIns="0" rIns="0" tIns="0" bIns="0">
+          <a:bodyPr wrap="square" lIns="0" tIns="0" rIns="0" bIns="0">
             <a:spAutoFit/>
           </a:bodyPr>
           <a:lstStyle/>
@@ -9990,7 +10053,7 @@
           <a:noFill/>
         </p:spPr>
         <p:txBody>
-          <a:bodyPr wrap="square" lIns="0" rIns="0" tIns="0" bIns="0">
+          <a:bodyPr wrap="square" lIns="0" tIns="0" rIns="0" bIns="0">
             <a:spAutoFit/>
           </a:bodyPr>
           <a:lstStyle/>
@@ -10032,7 +10095,7 @@
           <a:noFill/>
         </p:spPr>
         <p:txBody>
-          <a:bodyPr wrap="square" lIns="0" rIns="0" tIns="0" bIns="0">
+          <a:bodyPr wrap="square" lIns="0" tIns="0" rIns="0" bIns="0">
             <a:spAutoFit/>
           </a:bodyPr>
           <a:lstStyle/>
@@ -10074,7 +10137,7 @@
           <a:noFill/>
         </p:spPr>
         <p:txBody>
-          <a:bodyPr wrap="square" lIns="0" rIns="0" tIns="0" bIns="0">
+          <a:bodyPr wrap="square" lIns="0" tIns="0" rIns="0" bIns="0">
             <a:spAutoFit/>
           </a:bodyPr>
           <a:lstStyle/>
@@ -10140,6 +10203,7 @@
           <a:lstStyle/>
           <a:p>
             <a:pPr algn="ctr"/>
+            <a:endParaRPr/>
           </a:p>
         </p:txBody>
       </p:sp>
@@ -10160,7 +10224,7 @@
           <a:noFill/>
         </p:spPr>
         <p:txBody>
-          <a:bodyPr wrap="square" lIns="0" rIns="0" tIns="0" bIns="0">
+          <a:bodyPr wrap="square" lIns="0" tIns="0" rIns="0" bIns="0">
             <a:spAutoFit/>
           </a:bodyPr>
           <a:lstStyle/>
@@ -10202,7 +10266,7 @@
           <a:noFill/>
         </p:spPr>
         <p:txBody>
-          <a:bodyPr wrap="square" lIns="0" rIns="0" tIns="0" bIns="0">
+          <a:bodyPr wrap="square" lIns="0" tIns="0" rIns="0" bIns="0">
             <a:spAutoFit/>
           </a:bodyPr>
           <a:lstStyle/>
@@ -10244,7 +10308,7 @@
           <a:noFill/>
         </p:spPr>
         <p:txBody>
-          <a:bodyPr wrap="square" lIns="0" rIns="0" tIns="0" bIns="0">
+          <a:bodyPr wrap="square" lIns="0" tIns="0" rIns="0" bIns="0">
             <a:spAutoFit/>
           </a:bodyPr>
           <a:lstStyle/>
@@ -10286,7 +10350,7 @@
           <a:noFill/>
         </p:spPr>
         <p:txBody>
-          <a:bodyPr wrap="square" lIns="0" rIns="0" tIns="0" bIns="0">
+          <a:bodyPr wrap="square" lIns="0" tIns="0" rIns="0" bIns="0">
             <a:spAutoFit/>
           </a:bodyPr>
           <a:lstStyle/>
@@ -10328,7 +10392,7 @@
           <a:noFill/>
         </p:spPr>
         <p:txBody>
-          <a:bodyPr wrap="square" lIns="0" rIns="0" tIns="0" bIns="0">
+          <a:bodyPr wrap="square" lIns="0" tIns="0" rIns="0" bIns="0">
             <a:spAutoFit/>
           </a:bodyPr>
           <a:lstStyle/>
@@ -10370,7 +10434,7 @@
           <a:noFill/>
         </p:spPr>
         <p:txBody>
-          <a:bodyPr wrap="square" lIns="0" rIns="0" tIns="0" bIns="0">
+          <a:bodyPr wrap="square" lIns="0" tIns="0" rIns="0" bIns="0">
             <a:spAutoFit/>
           </a:bodyPr>
           <a:lstStyle/>
@@ -10520,7 +10584,7 @@
           <a:noFill/>
         </p:spPr>
         <p:txBody>
-          <a:bodyPr wrap="square" lIns="0" rIns="0" tIns="0" bIns="0">
+          <a:bodyPr wrap="square" lIns="0" tIns="0" rIns="0" bIns="0">
             <a:spAutoFit/>
           </a:bodyPr>
           <a:lstStyle/>
@@ -10571,7 +10635,7 @@
           <a:noFill/>
         </p:spPr>
         <p:txBody>
-          <a:bodyPr wrap="square" lIns="0" rIns="0" tIns="0" bIns="0">
+          <a:bodyPr wrap="square" lIns="0" tIns="0" rIns="0" bIns="0">
             <a:spAutoFit/>
           </a:bodyPr>
           <a:lstStyle/>
@@ -10648,6 +10712,7 @@
           <a:lstStyle/>
           <a:p>
             <a:pPr algn="ctr"/>
+            <a:endParaRPr/>
           </a:p>
         </p:txBody>
       </p:sp>
@@ -10668,7 +10733,7 @@
           <a:noFill/>
         </p:spPr>
         <p:txBody>
-          <a:bodyPr wrap="square" lIns="0" rIns="0" tIns="0" bIns="0">
+          <a:bodyPr wrap="square" lIns="0" tIns="0" rIns="0" bIns="0">
             <a:spAutoFit/>
           </a:bodyPr>
           <a:lstStyle/>
@@ -10710,7 +10775,7 @@
           <a:noFill/>
         </p:spPr>
         <p:txBody>
-          <a:bodyPr wrap="square" lIns="0" rIns="0" tIns="0" bIns="0">
+          <a:bodyPr wrap="square" lIns="0" tIns="0" rIns="0" bIns="0">
             <a:spAutoFit/>
           </a:bodyPr>
           <a:lstStyle/>
@@ -10790,7 +10855,7 @@
           <a:noFill/>
         </p:spPr>
         <p:txBody>
-          <a:bodyPr wrap="square" lIns="0" rIns="0" tIns="0" bIns="0">
+          <a:bodyPr wrap="square" lIns="0" tIns="0" rIns="0" bIns="0">
             <a:spAutoFit/>
           </a:bodyPr>
           <a:lstStyle/>
@@ -10824,7 +10889,7 @@
 </file>
 
 <file path=ppt/slides/slide6.xml><?xml version="1.0" encoding="utf-8"?>
-<p:sld xmlns:a="http://schemas.openxmlformats.org/drawingml/2006/main" xmlns:p="http://schemas.openxmlformats.org/presentationml/2006/main" xmlns:r="http://schemas.openxmlformats.org/officeDocument/2006/relationships">
+<p:sld xmlns:a="http://schemas.openxmlformats.org/drawingml/2006/main" xmlns:r="http://schemas.openxmlformats.org/officeDocument/2006/relationships" xmlns:p="http://schemas.openxmlformats.org/presentationml/2006/main">
   <p:cSld>
     <p:spTree>
       <p:nvGrpSpPr>
@@ -10832,7 +10897,14 @@
         <p:cNvGrpSpPr/>
         <p:nvPr/>
       </p:nvGrpSpPr>
-      <p:grpSpPr/>
+      <p:grpSpPr>
+        <a:xfrm>
+          <a:off x="0" y="0"/>
+          <a:ext cx="0" cy="0"/>
+          <a:chOff x="0" y="0"/>
+          <a:chExt cx="0" cy="0"/>
+        </a:xfrm>
+      </p:grpSpPr>
       <p:pic>
         <p:nvPicPr>
           <p:cNvPr id="2" name="Picture 1" descr="AIM_logo_2017.svg.png"/>
@@ -10874,7 +10946,7 @@
           <a:noFill/>
         </p:spPr>
         <p:txBody>
-          <a:bodyPr wrap="square" lIns="0" rIns="0" tIns="0" bIns="0">
+          <a:bodyPr wrap="square" lIns="0" tIns="0" rIns="0" bIns="0">
             <a:spAutoFit/>
           </a:bodyPr>
           <a:lstStyle/>
@@ -10916,7 +10988,7 @@
           <a:noFill/>
         </p:spPr>
         <p:txBody>
-          <a:bodyPr wrap="square" lIns="0" rIns="0" tIns="0" bIns="0">
+          <a:bodyPr wrap="square" lIns="0" tIns="0" rIns="0" bIns="0">
             <a:spAutoFit/>
           </a:bodyPr>
           <a:lstStyle/>
@@ -10958,7 +11030,7 @@
           <a:noFill/>
         </p:spPr>
         <p:txBody>
-          <a:bodyPr wrap="square" lIns="0" rIns="0" tIns="0" bIns="0">
+          <a:bodyPr wrap="square" lIns="0" tIns="0" rIns="0" bIns="0">
             <a:spAutoFit/>
           </a:bodyPr>
           <a:lstStyle/>
@@ -11000,7 +11072,7 @@
           <a:noFill/>
         </p:spPr>
         <p:txBody>
-          <a:bodyPr wrap="square" lIns="0" rIns="0" tIns="0" bIns="0">
+          <a:bodyPr wrap="square" lIns="0" tIns="0" rIns="0" bIns="0">
             <a:spAutoFit/>
           </a:bodyPr>
           <a:lstStyle/>
@@ -11042,7 +11114,7 @@
           <a:noFill/>
         </p:spPr>
         <p:txBody>
-          <a:bodyPr wrap="square" lIns="0" rIns="0" tIns="0" bIns="0">
+          <a:bodyPr wrap="square" lIns="0" tIns="0" rIns="0" bIns="0">
             <a:spAutoFit/>
           </a:bodyPr>
           <a:lstStyle/>
@@ -11093,7 +11165,7 @@
           <a:noFill/>
         </p:spPr>
         <p:txBody>
-          <a:bodyPr wrap="square" lIns="0" rIns="0" tIns="0" bIns="0">
+          <a:bodyPr wrap="square" lIns="0" tIns="0" rIns="0" bIns="0">
             <a:spAutoFit/>
           </a:bodyPr>
           <a:lstStyle/>
@@ -11135,7 +11207,7 @@
           <a:noFill/>
         </p:spPr>
         <p:txBody>
-          <a:bodyPr wrap="square" lIns="0" rIns="0" tIns="0" bIns="0">
+          <a:bodyPr wrap="square" lIns="0" tIns="0" rIns="0" bIns="0">
             <a:spAutoFit/>
           </a:bodyPr>
           <a:lstStyle/>
@@ -11186,7 +11258,7 @@
           <a:noFill/>
         </p:spPr>
         <p:txBody>
-          <a:bodyPr wrap="square" lIns="0" rIns="0" tIns="0" bIns="0">
+          <a:bodyPr wrap="square" lIns="0" tIns="0" rIns="0" bIns="0">
             <a:spAutoFit/>
           </a:bodyPr>
           <a:lstStyle/>
@@ -11228,7 +11300,7 @@
           <a:noFill/>
         </p:spPr>
         <p:txBody>
-          <a:bodyPr wrap="square" lIns="0" rIns="0" tIns="0" bIns="0">
+          <a:bodyPr wrap="square" lIns="0" tIns="0" rIns="0" bIns="0">
             <a:spAutoFit/>
           </a:bodyPr>
           <a:lstStyle/>
@@ -11270,7 +11342,7 @@
           <a:noFill/>
         </p:spPr>
         <p:txBody>
-          <a:bodyPr wrap="square" lIns="0" rIns="0" tIns="0" bIns="0">
+          <a:bodyPr wrap="square" lIns="0" tIns="0" rIns="0" bIns="0">
             <a:spAutoFit/>
           </a:bodyPr>
           <a:lstStyle/>
@@ -11321,7 +11393,7 @@
           <a:noFill/>
         </p:spPr>
         <p:txBody>
-          <a:bodyPr wrap="square" lIns="0" rIns="0" tIns="0" bIns="0">
+          <a:bodyPr wrap="square" lIns="0" tIns="0" rIns="0" bIns="0">
             <a:spAutoFit/>
           </a:bodyPr>
           <a:lstStyle/>
@@ -11363,7 +11435,7 @@
           <a:noFill/>
         </p:spPr>
         <p:txBody>
-          <a:bodyPr wrap="square" lIns="0" rIns="0" tIns="0" bIns="0">
+          <a:bodyPr wrap="square" lIns="0" tIns="0" rIns="0" bIns="0">
             <a:spAutoFit/>
           </a:bodyPr>
           <a:lstStyle/>
@@ -11414,7 +11486,7 @@
           <a:noFill/>
         </p:spPr>
         <p:txBody>
-          <a:bodyPr wrap="square" lIns="0" rIns="0" tIns="0" bIns="0">
+          <a:bodyPr wrap="square" lIns="0" tIns="0" rIns="0" bIns="0">
             <a:spAutoFit/>
           </a:bodyPr>
           <a:lstStyle/>
@@ -11456,7 +11528,7 @@
           <a:noFill/>
         </p:spPr>
         <p:txBody>
-          <a:bodyPr wrap="square" lIns="0" rIns="0" tIns="0" bIns="0">
+          <a:bodyPr wrap="square" lIns="0" tIns="0" rIns="0" bIns="0">
             <a:spAutoFit/>
           </a:bodyPr>
           <a:lstStyle/>
@@ -11507,7 +11579,7 @@
           <a:noFill/>
         </p:spPr>
         <p:txBody>
-          <a:bodyPr wrap="square" lIns="0" rIns="0" tIns="0" bIns="0">
+          <a:bodyPr wrap="square" lIns="0" tIns="0" rIns="0" bIns="0">
             <a:spAutoFit/>
           </a:bodyPr>
           <a:lstStyle/>
@@ -11549,7 +11621,7 @@
           <a:noFill/>
         </p:spPr>
         <p:txBody>
-          <a:bodyPr wrap="square" lIns="0" rIns="0" tIns="0" bIns="0">
+          <a:bodyPr wrap="square" lIns="0" tIns="0" rIns="0" bIns="0">
             <a:spAutoFit/>
           </a:bodyPr>
           <a:lstStyle/>
@@ -11617,6 +11689,7 @@
           <a:lstStyle/>
           <a:p>
             <a:pPr algn="ctr"/>
+            <a:endParaRPr/>
           </a:p>
         </p:txBody>
       </p:sp>
@@ -11637,7 +11710,7 @@
           <a:noFill/>
         </p:spPr>
         <p:txBody>
-          <a:bodyPr wrap="square" lIns="0" rIns="0" tIns="0" bIns="0">
+          <a:bodyPr wrap="square" lIns="0" tIns="0" rIns="0" bIns="0">
             <a:spAutoFit/>
           </a:bodyPr>
           <a:lstStyle/>
@@ -11679,7 +11752,7 @@
           <a:noFill/>
         </p:spPr>
         <p:txBody>
-          <a:bodyPr wrap="square" lIns="0" rIns="0" tIns="0" bIns="0">
+          <a:bodyPr wrap="square" lIns="0" tIns="0" rIns="0" bIns="0">
             <a:spAutoFit/>
           </a:bodyPr>
           <a:lstStyle/>
@@ -11759,7 +11832,7 @@
           <a:noFill/>
         </p:spPr>
         <p:txBody>
-          <a:bodyPr wrap="square" lIns="0" rIns="0" tIns="0" bIns="0">
+          <a:bodyPr wrap="square" lIns="0" tIns="0" rIns="0" bIns="0">
             <a:spAutoFit/>
           </a:bodyPr>
           <a:lstStyle/>
@@ -11793,7 +11866,7 @@
 </file>
 
 <file path=ppt/slides/slide7.xml><?xml version="1.0" encoding="utf-8"?>
-<p:sld xmlns:a="http://schemas.openxmlformats.org/drawingml/2006/main" xmlns:p="http://schemas.openxmlformats.org/presentationml/2006/main" xmlns:r="http://schemas.openxmlformats.org/officeDocument/2006/relationships">
+<p:sld xmlns:a="http://schemas.openxmlformats.org/drawingml/2006/main" xmlns:r="http://schemas.openxmlformats.org/officeDocument/2006/relationships" xmlns:p="http://schemas.openxmlformats.org/presentationml/2006/main">
   <p:cSld>
     <p:spTree>
       <p:nvGrpSpPr>
@@ -11801,7 +11874,14 @@
         <p:cNvGrpSpPr/>
         <p:nvPr/>
       </p:nvGrpSpPr>
-      <p:grpSpPr/>
+      <p:grpSpPr>
+        <a:xfrm>
+          <a:off x="0" y="0"/>
+          <a:ext cx="0" cy="0"/>
+          <a:chOff x="0" y="0"/>
+          <a:chExt cx="0" cy="0"/>
+        </a:xfrm>
+      </p:grpSpPr>
       <p:pic>
         <p:nvPicPr>
           <p:cNvPr id="2" name="Picture 1" descr="AIM_logo_2017.svg.png"/>
@@ -11843,7 +11923,7 @@
           <a:noFill/>
         </p:spPr>
         <p:txBody>
-          <a:bodyPr wrap="square" lIns="0" rIns="0" tIns="0" bIns="0">
+          <a:bodyPr wrap="square" lIns="0" tIns="0" rIns="0" bIns="0">
             <a:spAutoFit/>
           </a:bodyPr>
           <a:lstStyle/>
@@ -11885,7 +11965,7 @@
           <a:noFill/>
         </p:spPr>
         <p:txBody>
-          <a:bodyPr wrap="square" lIns="0" rIns="0" tIns="0" bIns="0">
+          <a:bodyPr wrap="square" lIns="0" tIns="0" rIns="0" bIns="0">
             <a:spAutoFit/>
           </a:bodyPr>
           <a:lstStyle/>
@@ -11975,6 +12055,7 @@
           <a:lstStyle/>
           <a:p>
             <a:pPr algn="ctr"/>
+            <a:endParaRPr/>
           </a:p>
         </p:txBody>
       </p:sp>
@@ -11995,7 +12076,7 @@
           <a:noFill/>
         </p:spPr>
         <p:txBody>
-          <a:bodyPr wrap="square" lIns="0" rIns="0" tIns="0" bIns="0">
+          <a:bodyPr wrap="square" lIns="0" tIns="0" rIns="0" bIns="0">
             <a:spAutoFit/>
           </a:bodyPr>
           <a:lstStyle/>
@@ -12037,7 +12118,7 @@
           <a:noFill/>
         </p:spPr>
         <p:txBody>
-          <a:bodyPr wrap="square" lIns="0" rIns="0" tIns="0" bIns="0">
+          <a:bodyPr wrap="square" lIns="0" tIns="0" rIns="0" bIns="0">
             <a:spAutoFit/>
           </a:bodyPr>
           <a:lstStyle/>
@@ -12079,7 +12160,7 @@
           <a:noFill/>
         </p:spPr>
         <p:txBody>
-          <a:bodyPr wrap="square" lIns="0" rIns="0" tIns="0" bIns="0">
+          <a:bodyPr wrap="square" lIns="0" tIns="0" rIns="0" bIns="0">
             <a:spAutoFit/>
           </a:bodyPr>
           <a:lstStyle/>
@@ -12145,6 +12226,7 @@
           <a:lstStyle/>
           <a:p>
             <a:pPr algn="ctr"/>
+            <a:endParaRPr/>
           </a:p>
         </p:txBody>
       </p:sp>
@@ -12165,7 +12247,7 @@
           <a:noFill/>
         </p:spPr>
         <p:txBody>
-          <a:bodyPr wrap="square" lIns="0" rIns="0" tIns="0" bIns="0">
+          <a:bodyPr wrap="square" lIns="0" tIns="0" rIns="0" bIns="0">
             <a:spAutoFit/>
           </a:bodyPr>
           <a:lstStyle/>
@@ -12207,7 +12289,7 @@
           <a:noFill/>
         </p:spPr>
         <p:txBody>
-          <a:bodyPr wrap="square" lIns="0" rIns="0" tIns="0" bIns="0">
+          <a:bodyPr wrap="square" lIns="0" tIns="0" rIns="0" bIns="0">
             <a:spAutoFit/>
           </a:bodyPr>
           <a:lstStyle/>
@@ -12249,7 +12331,7 @@
           <a:noFill/>
         </p:spPr>
         <p:txBody>
-          <a:bodyPr wrap="square" lIns="0" rIns="0" tIns="0" bIns="0">
+          <a:bodyPr wrap="square" lIns="0" tIns="0" rIns="0" bIns="0">
             <a:spAutoFit/>
           </a:bodyPr>
           <a:lstStyle/>
@@ -12315,6 +12397,7 @@
           <a:lstStyle/>
           <a:p>
             <a:pPr algn="ctr"/>
+            <a:endParaRPr/>
           </a:p>
         </p:txBody>
       </p:sp>
@@ -12335,7 +12418,7 @@
           <a:noFill/>
         </p:spPr>
         <p:txBody>
-          <a:bodyPr wrap="square" lIns="0" rIns="0" tIns="0" bIns="0">
+          <a:bodyPr wrap="square" lIns="0" tIns="0" rIns="0" bIns="0">
             <a:spAutoFit/>
           </a:bodyPr>
           <a:lstStyle/>
@@ -12377,7 +12460,7 @@
           <a:noFill/>
         </p:spPr>
         <p:txBody>
-          <a:bodyPr wrap="square" lIns="0" rIns="0" tIns="0" bIns="0">
+          <a:bodyPr wrap="square" lIns="0" tIns="0" rIns="0" bIns="0">
             <a:spAutoFit/>
           </a:bodyPr>
           <a:lstStyle/>
@@ -12419,7 +12502,7 @@
           <a:noFill/>
         </p:spPr>
         <p:txBody>
-          <a:bodyPr wrap="square" lIns="0" rIns="0" tIns="0" bIns="0">
+          <a:bodyPr wrap="square" lIns="0" tIns="0" rIns="0" bIns="0">
             <a:spAutoFit/>
           </a:bodyPr>
           <a:lstStyle/>
@@ -12485,6 +12568,7 @@
           <a:lstStyle/>
           <a:p>
             <a:pPr algn="ctr"/>
+            <a:endParaRPr/>
           </a:p>
         </p:txBody>
       </p:sp>
@@ -12505,7 +12589,7 @@
           <a:noFill/>
         </p:spPr>
         <p:txBody>
-          <a:bodyPr wrap="square" lIns="0" rIns="0" tIns="0" bIns="0">
+          <a:bodyPr wrap="square" lIns="0" tIns="0" rIns="0" bIns="0">
             <a:spAutoFit/>
           </a:bodyPr>
           <a:lstStyle/>
@@ -12547,7 +12631,7 @@
           <a:noFill/>
         </p:spPr>
         <p:txBody>
-          <a:bodyPr wrap="square" lIns="0" rIns="0" tIns="0" bIns="0">
+          <a:bodyPr wrap="square" lIns="0" tIns="0" rIns="0" bIns="0">
             <a:spAutoFit/>
           </a:bodyPr>
           <a:lstStyle/>
@@ -12589,7 +12673,7 @@
           <a:noFill/>
         </p:spPr>
         <p:txBody>
-          <a:bodyPr wrap="square" lIns="0" rIns="0" tIns="0" bIns="0">
+          <a:bodyPr wrap="square" lIns="0" tIns="0" rIns="0" bIns="0">
             <a:spAutoFit/>
           </a:bodyPr>
           <a:lstStyle/>
@@ -12655,6 +12739,7 @@
           <a:lstStyle/>
           <a:p>
             <a:pPr algn="ctr"/>
+            <a:endParaRPr/>
           </a:p>
         </p:txBody>
       </p:sp>
@@ -12675,7 +12760,7 @@
           <a:noFill/>
         </p:spPr>
         <p:txBody>
-          <a:bodyPr wrap="square" lIns="0" rIns="0" tIns="0" bIns="0">
+          <a:bodyPr wrap="square" lIns="0" tIns="0" rIns="0" bIns="0">
             <a:spAutoFit/>
           </a:bodyPr>
           <a:lstStyle/>
@@ -12717,7 +12802,7 @@
           <a:noFill/>
         </p:spPr>
         <p:txBody>
-          <a:bodyPr wrap="square" lIns="0" rIns="0" tIns="0" bIns="0">
+          <a:bodyPr wrap="square" lIns="0" tIns="0" rIns="0" bIns="0">
             <a:spAutoFit/>
           </a:bodyPr>
           <a:lstStyle/>
@@ -12759,7 +12844,7 @@
           <a:noFill/>
         </p:spPr>
         <p:txBody>
-          <a:bodyPr wrap="square" lIns="0" rIns="0" tIns="0" bIns="0">
+          <a:bodyPr wrap="square" lIns="0" tIns="0" rIns="0" bIns="0">
             <a:spAutoFit/>
           </a:bodyPr>
           <a:lstStyle/>
@@ -12825,6 +12910,7 @@
           <a:lstStyle/>
           <a:p>
             <a:pPr algn="ctr"/>
+            <a:endParaRPr/>
           </a:p>
         </p:txBody>
       </p:sp>
@@ -12845,7 +12931,7 @@
           <a:noFill/>
         </p:spPr>
         <p:txBody>
-          <a:bodyPr wrap="square" lIns="0" rIns="0" tIns="0" bIns="0">
+          <a:bodyPr wrap="square" lIns="0" tIns="0" rIns="0" bIns="0">
             <a:spAutoFit/>
           </a:bodyPr>
           <a:lstStyle/>
@@ -12887,7 +12973,7 @@
           <a:noFill/>
         </p:spPr>
         <p:txBody>
-          <a:bodyPr wrap="square" lIns="0" rIns="0" tIns="0" bIns="0">
+          <a:bodyPr wrap="square" lIns="0" tIns="0" rIns="0" bIns="0">
             <a:spAutoFit/>
           </a:bodyPr>
           <a:lstStyle/>
@@ -12929,7 +13015,7 @@
           <a:noFill/>
         </p:spPr>
         <p:txBody>
-          <a:bodyPr wrap="square" lIns="0" rIns="0" tIns="0" bIns="0">
+          <a:bodyPr wrap="square" lIns="0" tIns="0" rIns="0" bIns="0">
             <a:spAutoFit/>
           </a:bodyPr>
           <a:lstStyle/>
@@ -12995,6 +13081,7 @@
           <a:lstStyle/>
           <a:p>
             <a:pPr algn="ctr"/>
+            <a:endParaRPr/>
           </a:p>
         </p:txBody>
       </p:sp>
@@ -13015,7 +13102,7 @@
           <a:noFill/>
         </p:spPr>
         <p:txBody>
-          <a:bodyPr wrap="square" lIns="0" rIns="0" tIns="0" bIns="0">
+          <a:bodyPr wrap="square" lIns="0" tIns="0" rIns="0" bIns="0">
             <a:spAutoFit/>
           </a:bodyPr>
           <a:lstStyle/>
@@ -13057,7 +13144,7 @@
           <a:noFill/>
         </p:spPr>
         <p:txBody>
-          <a:bodyPr wrap="square" lIns="0" rIns="0" tIns="0" bIns="0">
+          <a:bodyPr wrap="square" lIns="0" tIns="0" rIns="0" bIns="0">
             <a:spAutoFit/>
           </a:bodyPr>
           <a:lstStyle/>
@@ -13099,7 +13186,7 @@
           <a:noFill/>
         </p:spPr>
         <p:txBody>
-          <a:bodyPr wrap="square" lIns="0" rIns="0" tIns="0" bIns="0">
+          <a:bodyPr wrap="square" lIns="0" tIns="0" rIns="0" bIns="0">
             <a:spAutoFit/>
           </a:bodyPr>
           <a:lstStyle/>
@@ -13249,7 +13336,7 @@
           <a:noFill/>
         </p:spPr>
         <p:txBody>
-          <a:bodyPr wrap="square" lIns="0" rIns="0" tIns="0" bIns="0">
+          <a:bodyPr wrap="square" lIns="0" tIns="0" rIns="0" bIns="0">
             <a:spAutoFit/>
           </a:bodyPr>
           <a:lstStyle/>
@@ -13300,7 +13387,7 @@
           <a:noFill/>
         </p:spPr>
         <p:txBody>
-          <a:bodyPr wrap="square" lIns="0" rIns="0" tIns="0" bIns="0">
+          <a:bodyPr wrap="square" lIns="0" tIns="0" rIns="0" bIns="0">
             <a:spAutoFit/>
           </a:bodyPr>
           <a:lstStyle/>
@@ -13351,7 +13438,7 @@
           <a:noFill/>
         </p:spPr>
         <p:txBody>
-          <a:bodyPr wrap="square" lIns="0" rIns="0" tIns="0" bIns="0">
+          <a:bodyPr wrap="square" lIns="0" tIns="0" rIns="0" bIns="0">
             <a:spAutoFit/>
           </a:bodyPr>
           <a:lstStyle/>
@@ -13385,7 +13472,7 @@
 </file>
 
 <file path=ppt/slides/slide8.xml><?xml version="1.0" encoding="utf-8"?>
-<p:sld xmlns:a="http://schemas.openxmlformats.org/drawingml/2006/main" xmlns:p="http://schemas.openxmlformats.org/presentationml/2006/main" xmlns:r="http://schemas.openxmlformats.org/officeDocument/2006/relationships">
+<p:sld xmlns:a="http://schemas.openxmlformats.org/drawingml/2006/main" xmlns:r="http://schemas.openxmlformats.org/officeDocument/2006/relationships" xmlns:p="http://schemas.openxmlformats.org/presentationml/2006/main">
   <p:cSld>
     <p:spTree>
       <p:nvGrpSpPr>
@@ -13393,7 +13480,14 @@
         <p:cNvGrpSpPr/>
         <p:nvPr/>
       </p:nvGrpSpPr>
-      <p:grpSpPr/>
+      <p:grpSpPr>
+        <a:xfrm>
+          <a:off x="0" y="0"/>
+          <a:ext cx="0" cy="0"/>
+          <a:chOff x="0" y="0"/>
+          <a:chExt cx="0" cy="0"/>
+        </a:xfrm>
+      </p:grpSpPr>
       <p:pic>
         <p:nvPicPr>
           <p:cNvPr id="2" name="Picture 1" descr="AIM_logo_2017.svg.png"/>
@@ -13435,7 +13529,7 @@
           <a:noFill/>
         </p:spPr>
         <p:txBody>
-          <a:bodyPr wrap="square" lIns="0" rIns="0" tIns="0" bIns="0">
+          <a:bodyPr wrap="square" lIns="0" tIns="0" rIns="0" bIns="0">
             <a:spAutoFit/>
           </a:bodyPr>
           <a:lstStyle/>
@@ -13477,7 +13571,7 @@
           <a:noFill/>
         </p:spPr>
         <p:txBody>
-          <a:bodyPr wrap="square" lIns="0" rIns="0" tIns="0" bIns="0">
+          <a:bodyPr wrap="square" lIns="0" tIns="0" rIns="0" bIns="0">
             <a:spAutoFit/>
           </a:bodyPr>
           <a:lstStyle/>
@@ -13543,7 +13637,7 @@
           <a:noFill/>
         </p:spPr>
         <p:txBody>
-          <a:bodyPr wrap="square" lIns="0" rIns="0" tIns="0" bIns="0">
+          <a:bodyPr wrap="square" lIns="0" tIns="0" rIns="0" bIns="0">
             <a:spAutoFit/>
           </a:bodyPr>
           <a:lstStyle/>
@@ -13585,7 +13679,7 @@
           <a:noFill/>
         </p:spPr>
         <p:txBody>
-          <a:bodyPr wrap="square" lIns="0" rIns="0" tIns="0" bIns="0">
+          <a:bodyPr wrap="square" lIns="0" tIns="0" rIns="0" bIns="0">
             <a:spAutoFit/>
           </a:bodyPr>
           <a:lstStyle/>
@@ -13636,7 +13730,7 @@
           <a:noFill/>
         </p:spPr>
         <p:txBody>
-          <a:bodyPr wrap="square" lIns="0" rIns="0" tIns="0" bIns="0">
+          <a:bodyPr wrap="square" lIns="0" tIns="0" rIns="0" bIns="0">
             <a:spAutoFit/>
           </a:bodyPr>
           <a:lstStyle/>
@@ -13678,7 +13772,7 @@
           <a:noFill/>
         </p:spPr>
         <p:txBody>
-          <a:bodyPr wrap="square" lIns="0" rIns="0" tIns="0" bIns="0">
+          <a:bodyPr wrap="square" lIns="0" tIns="0" rIns="0" bIns="0">
             <a:spAutoFit/>
           </a:bodyPr>
           <a:lstStyle/>
@@ -13729,7 +13823,7 @@
           <a:noFill/>
         </p:spPr>
         <p:txBody>
-          <a:bodyPr wrap="square" lIns="0" rIns="0" tIns="0" bIns="0">
+          <a:bodyPr wrap="square" lIns="0" tIns="0" rIns="0" bIns="0">
             <a:spAutoFit/>
           </a:bodyPr>
           <a:lstStyle/>
@@ -13771,7 +13865,7 @@
           <a:noFill/>
         </p:spPr>
         <p:txBody>
-          <a:bodyPr wrap="square" lIns="0" rIns="0" tIns="0" bIns="0">
+          <a:bodyPr wrap="square" lIns="0" tIns="0" rIns="0" bIns="0">
             <a:spAutoFit/>
           </a:bodyPr>
           <a:lstStyle/>
@@ -13822,7 +13916,7 @@
           <a:noFill/>
         </p:spPr>
         <p:txBody>
-          <a:bodyPr wrap="square" lIns="0" rIns="0" tIns="0" bIns="0">
+          <a:bodyPr wrap="square" lIns="0" tIns="0" rIns="0" bIns="0">
             <a:spAutoFit/>
           </a:bodyPr>
           <a:lstStyle/>
@@ -13856,7 +13950,7 @@
 </file>
 
 <file path=ppt/slides/slide9.xml><?xml version="1.0" encoding="utf-8"?>
-<p:sld xmlns:a="http://schemas.openxmlformats.org/drawingml/2006/main" xmlns:p="http://schemas.openxmlformats.org/presentationml/2006/main" xmlns:r="http://schemas.openxmlformats.org/officeDocument/2006/relationships">
+<p:sld xmlns:a="http://schemas.openxmlformats.org/drawingml/2006/main" xmlns:r="http://schemas.openxmlformats.org/officeDocument/2006/relationships" xmlns:p="http://schemas.openxmlformats.org/presentationml/2006/main">
   <p:cSld>
     <p:spTree>
       <p:nvGrpSpPr>
@@ -13864,7 +13958,14 @@
         <p:cNvGrpSpPr/>
         <p:nvPr/>
       </p:nvGrpSpPr>
-      <p:grpSpPr/>
+      <p:grpSpPr>
+        <a:xfrm>
+          <a:off x="0" y="0"/>
+          <a:ext cx="0" cy="0"/>
+          <a:chOff x="0" y="0"/>
+          <a:chExt cx="0" cy="0"/>
+        </a:xfrm>
+      </p:grpSpPr>
       <p:pic>
         <p:nvPicPr>
           <p:cNvPr id="2" name="Picture 1" descr="AIM_logo_2017.svg.png"/>
@@ -13906,7 +14007,7 @@
           <a:noFill/>
         </p:spPr>
         <p:txBody>
-          <a:bodyPr wrap="square" lIns="0" rIns="0" tIns="0" bIns="0">
+          <a:bodyPr wrap="square" lIns="0" tIns="0" rIns="0" bIns="0">
             <a:spAutoFit/>
           </a:bodyPr>
           <a:lstStyle/>
@@ -13948,7 +14049,7 @@
           <a:noFill/>
         </p:spPr>
         <p:txBody>
-          <a:bodyPr wrap="square" lIns="0" rIns="0" tIns="0" bIns="0">
+          <a:bodyPr wrap="square" lIns="0" tIns="0" rIns="0" bIns="0">
             <a:spAutoFit/>
           </a:bodyPr>
           <a:lstStyle/>
@@ -14018,6 +14119,7 @@
           <a:lstStyle/>
           <a:p>
             <a:pPr algn="ctr"/>
+            <a:endParaRPr/>
           </a:p>
         </p:txBody>
       </p:sp>
@@ -14038,7 +14140,7 @@
           <a:noFill/>
         </p:spPr>
         <p:txBody>
-          <a:bodyPr wrap="square" lIns="0" rIns="0" tIns="0" bIns="0">
+          <a:bodyPr wrap="square" lIns="0" tIns="0" rIns="0" bIns="0">
             <a:spAutoFit/>
           </a:bodyPr>
           <a:lstStyle/>
@@ -14080,7 +14182,7 @@
           <a:noFill/>
         </p:spPr>
         <p:txBody>
-          <a:bodyPr wrap="square" lIns="0" rIns="0" tIns="0" bIns="0">
+          <a:bodyPr wrap="square" lIns="0" tIns="0" rIns="0" bIns="0">
             <a:spAutoFit/>
           </a:bodyPr>
           <a:lstStyle/>
@@ -14169,6 +14271,7 @@
           <a:lstStyle/>
           <a:p>
             <a:pPr algn="ctr"/>
+            <a:endParaRPr/>
           </a:p>
         </p:txBody>
       </p:sp>
@@ -14189,7 +14292,7 @@
           <a:noFill/>
         </p:spPr>
         <p:txBody>
-          <a:bodyPr wrap="square" lIns="0" rIns="0" tIns="0" bIns="0">
+          <a:bodyPr wrap="square" lIns="0" tIns="0" rIns="0" bIns="0">
             <a:spAutoFit/>
           </a:bodyPr>
           <a:lstStyle/>
@@ -14231,7 +14334,7 @@
           <a:noFill/>
         </p:spPr>
         <p:txBody>
-          <a:bodyPr wrap="square" lIns="0" rIns="0" tIns="0" bIns="0">
+          <a:bodyPr wrap="square" lIns="0" tIns="0" rIns="0" bIns="0">
             <a:spAutoFit/>
           </a:bodyPr>
           <a:lstStyle/>
@@ -14320,6 +14423,7 @@
           <a:lstStyle/>
           <a:p>
             <a:pPr algn="ctr"/>
+            <a:endParaRPr/>
           </a:p>
         </p:txBody>
       </p:sp>
@@ -14340,7 +14444,7 @@
           <a:noFill/>
         </p:spPr>
         <p:txBody>
-          <a:bodyPr wrap="square" lIns="0" rIns="0" tIns="0" bIns="0">
+          <a:bodyPr wrap="square" lIns="0" tIns="0" rIns="0" bIns="0">
             <a:spAutoFit/>
           </a:bodyPr>
           <a:lstStyle/>
@@ -14382,7 +14486,7 @@
           <a:noFill/>
         </p:spPr>
         <p:txBody>
-          <a:bodyPr wrap="square" lIns="0" rIns="0" tIns="0" bIns="0">
+          <a:bodyPr wrap="square" lIns="0" tIns="0" rIns="0" bIns="0">
             <a:spAutoFit/>
           </a:bodyPr>
           <a:lstStyle/>
@@ -14471,6 +14575,7 @@
           <a:lstStyle/>
           <a:p>
             <a:pPr algn="ctr"/>
+            <a:endParaRPr/>
           </a:p>
         </p:txBody>
       </p:sp>
@@ -14491,7 +14596,7 @@
           <a:noFill/>
         </p:spPr>
         <p:txBody>
-          <a:bodyPr wrap="square" lIns="0" rIns="0" tIns="0" bIns="0">
+          <a:bodyPr wrap="square" lIns="0" tIns="0" rIns="0" bIns="0">
             <a:spAutoFit/>
           </a:bodyPr>
           <a:lstStyle/>
@@ -14533,7 +14638,7 @@
           <a:noFill/>
         </p:spPr>
         <p:txBody>
-          <a:bodyPr wrap="square" lIns="0" rIns="0" tIns="0" bIns="0">
+          <a:bodyPr wrap="square" lIns="0" tIns="0" rIns="0" bIns="0">
             <a:spAutoFit/>
           </a:bodyPr>
           <a:lstStyle/>
@@ -14733,6 +14838,7 @@
           <a:lstStyle/>
           <a:p>
             <a:pPr algn="ctr"/>
+            <a:endParaRPr/>
           </a:p>
         </p:txBody>
       </p:sp>
@@ -14753,7 +14859,7 @@
           <a:noFill/>
         </p:spPr>
         <p:txBody>
-          <a:bodyPr wrap="square" lIns="0" rIns="0" tIns="0" bIns="0">
+          <a:bodyPr wrap="square" lIns="0" tIns="0" rIns="0" bIns="0">
             <a:spAutoFit/>
           </a:bodyPr>
           <a:lstStyle/>
@@ -14795,7 +14901,7 @@
           <a:noFill/>
         </p:spPr>
         <p:txBody>
-          <a:bodyPr wrap="square" lIns="0" rIns="0" tIns="0" bIns="0">
+          <a:bodyPr wrap="square" lIns="0" tIns="0" rIns="0" bIns="0">
             <a:spAutoFit/>
           </a:bodyPr>
           <a:lstStyle/>
@@ -14893,7 +14999,7 @@
           <a:noFill/>
         </p:spPr>
         <p:txBody>
-          <a:bodyPr wrap="square" lIns="0" rIns="0" tIns="0" bIns="0">
+          <a:bodyPr wrap="square" lIns="0" tIns="0" rIns="0" bIns="0">
             <a:spAutoFit/>
           </a:bodyPr>
           <a:lstStyle/>
@@ -14935,7 +15041,7 @@
           <a:noFill/>
         </p:spPr>
         <p:txBody>
-          <a:bodyPr wrap="square" lIns="0" rIns="0" tIns="0" bIns="0">
+          <a:bodyPr wrap="square" lIns="0" tIns="0" rIns="0" bIns="0">
             <a:spAutoFit/>
           </a:bodyPr>
           <a:lstStyle/>
@@ -15005,6 +15111,7 @@
           <a:lstStyle/>
           <a:p>
             <a:pPr algn="ctr"/>
+            <a:endParaRPr/>
           </a:p>
         </p:txBody>
       </p:sp>
@@ -15025,7 +15132,7 @@
           <a:noFill/>
         </p:spPr>
         <p:txBody>
-          <a:bodyPr wrap="square" lIns="0" rIns="0" tIns="0" bIns="0">
+          <a:bodyPr wrap="square" lIns="0" tIns="0" rIns="0" bIns="0">
             <a:spAutoFit/>
           </a:bodyPr>
           <a:lstStyle/>
@@ -15067,7 +15174,7 @@
           <a:noFill/>
         </p:spPr>
         <p:txBody>
-          <a:bodyPr wrap="square" lIns="0" rIns="0" tIns="0" bIns="0">
+          <a:bodyPr wrap="square" lIns="0" tIns="0" rIns="0" bIns="0">
             <a:spAutoFit/>
           </a:bodyPr>
           <a:lstStyle/>
@@ -15175,6 +15282,7 @@
           <a:lstStyle/>
           <a:p>
             <a:pPr algn="ctr"/>
+            <a:endParaRPr/>
           </a:p>
         </p:txBody>
       </p:sp>
@@ -15195,7 +15303,7 @@
           <a:noFill/>
         </p:spPr>
         <p:txBody>
-          <a:bodyPr wrap="square" lIns="0" rIns="0" tIns="0" bIns="0">
+          <a:bodyPr wrap="square" lIns="0" tIns="0" rIns="0" bIns="0">
             <a:spAutoFit/>
           </a:bodyPr>
           <a:lstStyle/>
@@ -15237,7 +15345,7 @@
           <a:noFill/>
         </p:spPr>
         <p:txBody>
-          <a:bodyPr wrap="square" lIns="0" rIns="0" tIns="0" bIns="0">
+          <a:bodyPr wrap="square" lIns="0" tIns="0" rIns="0" bIns="0">
             <a:spAutoFit/>
           </a:bodyPr>
           <a:lstStyle/>
@@ -15345,6 +15453,7 @@
           <a:lstStyle/>
           <a:p>
             <a:pPr algn="ctr"/>
+            <a:endParaRPr/>
           </a:p>
         </p:txBody>
       </p:sp>
@@ -15365,7 +15474,7 @@
           <a:noFill/>
         </p:spPr>
         <p:txBody>
-          <a:bodyPr wrap="square" lIns="0" rIns="0" tIns="0" bIns="0">
+          <a:bodyPr wrap="square" lIns="0" tIns="0" rIns="0" bIns="0">
             <a:spAutoFit/>
           </a:bodyPr>
           <a:lstStyle/>
@@ -15407,7 +15516,7 @@
           <a:noFill/>
         </p:spPr>
         <p:txBody>
-          <a:bodyPr wrap="square" lIns="0" rIns="0" tIns="0" bIns="0">
+          <a:bodyPr wrap="square" lIns="0" tIns="0" rIns="0" bIns="0">
             <a:spAutoFit/>
           </a:bodyPr>
           <a:lstStyle/>
@@ -15477,6 +15586,7 @@
           <a:lstStyle/>
           <a:p>
             <a:pPr algn="ctr"/>
+            <a:endParaRPr/>
           </a:p>
         </p:txBody>
       </p:sp>
@@ -15497,7 +15607,7 @@
           <a:noFill/>
         </p:spPr>
         <p:txBody>
-          <a:bodyPr wrap="square" lIns="0" rIns="0" tIns="0" bIns="0">
+          <a:bodyPr wrap="square" lIns="0" tIns="0" rIns="0" bIns="0">
             <a:spAutoFit/>
           </a:bodyPr>
           <a:lstStyle/>
@@ -15539,7 +15649,7 @@
           <a:noFill/>
         </p:spPr>
         <p:txBody>
-          <a:bodyPr wrap="square" lIns="0" rIns="0" tIns="0" bIns="0">
+          <a:bodyPr wrap="square" lIns="0" tIns="0" rIns="0" bIns="0">
             <a:spAutoFit/>
           </a:bodyPr>
           <a:lstStyle/>
@@ -15729,7 +15839,7 @@
           <a:noFill/>
         </p:spPr>
         <p:txBody>
-          <a:bodyPr wrap="square" lIns="0" rIns="0" tIns="0" bIns="0">
+          <a:bodyPr wrap="square" lIns="0" tIns="0" rIns="0" bIns="0">
             <a:spAutoFit/>
           </a:bodyPr>
           <a:lstStyle/>
@@ -15771,7 +15881,7 @@
           <a:noFill/>
         </p:spPr>
         <p:txBody>
-          <a:bodyPr wrap="square" lIns="0" rIns="0" tIns="0" bIns="0">
+          <a:bodyPr wrap="square" lIns="0" tIns="0" rIns="0" bIns="0">
             <a:spAutoFit/>
           </a:bodyPr>
           <a:lstStyle/>

--- a/submission/Debie_Galleros_Pillar5_CapstoneProject_TechnicalDeck.pptx
+++ b/submission/Debie_Galleros_Pillar5_CapstoneProject_TechnicalDeck.pptx
@@ -312,7 +312,7 @@
           <a:p>
             <a:fld id="{5BCAD085-E8A6-8845-BD4E-CB4CCA059FC4}" type="datetimeFigureOut">
               <a:rPr lang="en-US" smtClean="0"/>
-              <a:t>7/12/26</a:t>
+              <a:t>7/13/26</a:t>
             </a:fld>
             <a:endParaRPr lang="en-US"/>
           </a:p>
@@ -480,7 +480,7 @@
           <a:p>
             <a:fld id="{5BCAD085-E8A6-8845-BD4E-CB4CCA059FC4}" type="datetimeFigureOut">
               <a:rPr lang="en-US" smtClean="0"/>
-              <a:t>7/12/26</a:t>
+              <a:t>7/13/26</a:t>
             </a:fld>
             <a:endParaRPr lang="en-US"/>
           </a:p>
@@ -658,7 +658,7 @@
           <a:p>
             <a:fld id="{5BCAD085-E8A6-8845-BD4E-CB4CCA059FC4}" type="datetimeFigureOut">
               <a:rPr lang="en-US" smtClean="0"/>
-              <a:t>7/12/26</a:t>
+              <a:t>7/13/26</a:t>
             </a:fld>
             <a:endParaRPr lang="en-US"/>
           </a:p>
@@ -826,7 +826,7 @@
           <a:p>
             <a:fld id="{5BCAD085-E8A6-8845-BD4E-CB4CCA059FC4}" type="datetimeFigureOut">
               <a:rPr lang="en-US" smtClean="0"/>
-              <a:t>7/12/26</a:t>
+              <a:t>7/13/26</a:t>
             </a:fld>
             <a:endParaRPr lang="en-US"/>
           </a:p>
@@ -1071,7 +1071,7 @@
           <a:p>
             <a:fld id="{5BCAD085-E8A6-8845-BD4E-CB4CCA059FC4}" type="datetimeFigureOut">
               <a:rPr lang="en-US" smtClean="0"/>
-              <a:t>7/12/26</a:t>
+              <a:t>7/13/26</a:t>
             </a:fld>
             <a:endParaRPr lang="en-US"/>
           </a:p>
@@ -1356,7 +1356,7 @@
           <a:p>
             <a:fld id="{5BCAD085-E8A6-8845-BD4E-CB4CCA059FC4}" type="datetimeFigureOut">
               <a:rPr lang="en-US" smtClean="0"/>
-              <a:t>7/12/26</a:t>
+              <a:t>7/13/26</a:t>
             </a:fld>
             <a:endParaRPr lang="en-US"/>
           </a:p>
@@ -1775,7 +1775,7 @@
           <a:p>
             <a:fld id="{5BCAD085-E8A6-8845-BD4E-CB4CCA059FC4}" type="datetimeFigureOut">
               <a:rPr lang="en-US" smtClean="0"/>
-              <a:t>7/12/26</a:t>
+              <a:t>7/13/26</a:t>
             </a:fld>
             <a:endParaRPr lang="en-US"/>
           </a:p>
@@ -1892,7 +1892,7 @@
           <a:p>
             <a:fld id="{5BCAD085-E8A6-8845-BD4E-CB4CCA059FC4}" type="datetimeFigureOut">
               <a:rPr lang="en-US" smtClean="0"/>
-              <a:t>7/12/26</a:t>
+              <a:t>7/13/26</a:t>
             </a:fld>
             <a:endParaRPr lang="en-US"/>
           </a:p>
@@ -1987,7 +1987,7 @@
           <a:p>
             <a:fld id="{5BCAD085-E8A6-8845-BD4E-CB4CCA059FC4}" type="datetimeFigureOut">
               <a:rPr lang="en-US" smtClean="0"/>
-              <a:t>7/12/26</a:t>
+              <a:t>7/13/26</a:t>
             </a:fld>
             <a:endParaRPr lang="en-US"/>
           </a:p>
@@ -2262,7 +2262,7 @@
           <a:p>
             <a:fld id="{5BCAD085-E8A6-8845-BD4E-CB4CCA059FC4}" type="datetimeFigureOut">
               <a:rPr lang="en-US" smtClean="0"/>
-              <a:t>7/12/26</a:t>
+              <a:t>7/13/26</a:t>
             </a:fld>
             <a:endParaRPr lang="en-US"/>
           </a:p>
@@ -2514,7 +2514,7 @@
           <a:p>
             <a:fld id="{5BCAD085-E8A6-8845-BD4E-CB4CCA059FC4}" type="datetimeFigureOut">
               <a:rPr lang="en-US" smtClean="0"/>
-              <a:t>7/12/26</a:t>
+              <a:t>7/13/26</a:t>
             </a:fld>
             <a:endParaRPr lang="en-US"/>
           </a:p>
@@ -2725,7 +2725,7 @@
           <a:p>
             <a:fld id="{5BCAD085-E8A6-8845-BD4E-CB4CCA059FC4}" type="datetimeFigureOut">
               <a:rPr lang="en-US" smtClean="0"/>
-              <a:t>7/12/26</a:t>
+              <a:t>7/13/26</a:t>
             </a:fld>
             <a:endParaRPr lang="en-US"/>
           </a:p>
@@ -3303,48 +3303,6 @@
       </p:sp>
       <p:sp>
         <p:nvSpPr>
-          <p:cNvPr id="7" name="TextBox 6"/>
-          <p:cNvSpPr txBox="1"/>
-          <p:nvPr/>
-        </p:nvSpPr>
-        <p:spPr>
-          <a:xfrm>
-            <a:off x="1097280" y="5047488"/>
-            <a:ext cx="9994392" cy="189411"/>
-          </a:xfrm>
-          <a:prstGeom prst="rect">
-            <a:avLst/>
-          </a:prstGeom>
-          <a:noFill/>
-        </p:spPr>
-        <p:txBody>
-          <a:bodyPr wrap="square" lIns="0" tIns="0" rIns="0" bIns="0">
-            <a:spAutoFit/>
-          </a:bodyPr>
-          <a:lstStyle/>
-          <a:p>
-            <a:pPr algn="ctr">
-              <a:lnSpc>
-                <a:spcPct val="106000"/>
-              </a:lnSpc>
-              <a:spcAft>
-                <a:spcPts val="600"/>
-              </a:spcAft>
-            </a:pPr>
-            <a:r>
-              <a:rPr sz="1250" b="0" i="1" dirty="0">
-                <a:solidFill>
-                  <a:srgbClr val="595959"/>
-                </a:solidFill>
-                <a:latin typeface="Arial"/>
-              </a:rPr>
-              <a:t>A virtual fitting room with size recommendations and tailored advice</a:t>
-            </a:r>
-          </a:p>
-        </p:txBody>
-      </p:sp>
-      <p:sp>
-        <p:nvSpPr>
           <p:cNvPr id="8" name="TextBox 7"/>
           <p:cNvSpPr txBox="1"/>
           <p:nvPr/>
@@ -3390,6 +3348,14 @@
   <p:clrMapOvr>
     <a:masterClrMapping/>
   </p:clrMapOvr>
+  <mc:AlternateContent xmlns:mc="http://schemas.openxmlformats.org/markup-compatibility/2006">
+    <mc:Choice xmlns:p14="http://schemas.microsoft.com/office/powerpoint/2010/main" Requires="p14">
+      <p:transition spd="slow" p14:dur="2000" advTm="1733"/>
+    </mc:Choice>
+    <mc:Fallback>
+      <p:transition spd="slow" advTm="1733"/>
+    </mc:Fallback>
+  </mc:AlternateContent>
 </p:sld>
 </file>
 

--- a/submission/Debie_Galleros_Pillar5_CapstoneProject_TechnicalDeck.pptx
+++ b/submission/Debie_Galleros_Pillar5_CapstoneProject_TechnicalDeck.pptx
@@ -3309,7 +3309,7 @@
         </p:nvSpPr>
         <p:spPr>
           <a:xfrm>
-            <a:off x="1097280" y="5989320"/>
+            <a:off x="1097280" y="5193792"/>
             <a:ext cx="9994392" cy="320040"/>
           </a:xfrm>
           <a:prstGeom prst="rect">

--- a/submission/Debie_Galleros_Pillar5_CapstoneProject_TechnicalDeck.pptx
+++ b/submission/Debie_Galleros_Pillar5_CapstoneProject_TechnicalDeck.pptx
@@ -3161,7 +3161,7 @@
                 </a:solidFill>
                 <a:latin typeface="Arial"/>
               </a:rPr>
-              <a:t>FitML</a:t>
+              <a:t>FitML: A Fairness-Audited Machine Learning System for Sizing and Intelligent Virtual Try-On in E-Commerce</a:t>
             </a:r>
             <a:r>
               <a:rPr sz="3000" b="1" i="0" dirty="0">
@@ -3170,7 +3170,7 @@
                 </a:solidFill>
                 <a:latin typeface="Arial"/>
               </a:rPr>
-              <a:t>: A Fairness-Audited Machine Learning System for Sizing and Augmented Reality Try-On in E-Commerce</a:t>
+              <a:t/>
             </a:r>
           </a:p>
         </p:txBody>
@@ -3528,7 +3528,7 @@
                 </a:solidFill>
                 <a:latin typeface="Arial"/>
               </a:rPr>
-              <a:t>Claude API — multimodal fit advice</a:t>
+              <a:t>Claude Vision + Replicate — generative try-on &amp; fit advice</a:t>
             </a:r>
           </a:p>
         </p:txBody>
@@ -3570,7 +3570,7 @@
                 </a:solidFill>
                 <a:latin typeface="Arial"/>
               </a:rPr>
-              <a:t>Measurements + recommendation + the composited try-on image in; two paragraphs of plain-language advice out (the second must start “Note:” with visual observations; tailoring jargon banned in the prompt).</a:t>
+              <a:t>Claude Vision analyzes the shopper's photo + garment, producing a structured prompt; IDM-VTON (default) or SDXL inpainting renders the try-on via Replicate. Claude then reviews the composited image for two paragraphs of plain-language advice (second must start “Note:”; tailoring jargon banned).</a:t>
             </a:r>
           </a:p>
           <a:p>
@@ -3589,7 +3589,7 @@
                 </a:solidFill>
                 <a:latin typeface="Arial"/>
               </a:rPr>
-              <a:t>Never estimates measurements · never overrides the model · read-only consumer of the prediction.</a:t>
+              <a:t>Try-on renders the recommended size, never decides it. Advice never estimates measurements or overrides the model — a read-only consumer of the prediction.</a:t>
             </a:r>
           </a:p>
         </p:txBody>
@@ -6308,7 +6308,7 @@
                 </a:solidFill>
                 <a:latin typeface="Arial"/>
               </a:rPr>
-              <a:t>2D AR try-on </a:t>
+              <a:t>Generative AI try-on (IDM-VTON/SDXL via Replicate) gives the visual answer, with a 2D compositor as automatic fallback — not 3D</a:t>
             </a:r>
             <a:r>
               <a:rPr sz="1250" b="0" i="0">
@@ -6317,7 +6317,7 @@
                 </a:solidFill>
                 <a:latin typeface="Arial"/>
               </a:rPr>
-              <a:t>gives the visual answer without 3D or diffusion models (explicitly scoped out)</a:t>
+              <a:t/>
             </a:r>
           </a:p>
         </p:txBody>
@@ -15369,7 +15369,7 @@
                 </a:solidFill>
                 <a:latin typeface="Arial"/>
               </a:rPr>
-              <a:t>chart-anchored) · /try-on · /advice</a:t>
+              <a:t>chart-anchored) · /api/tryon · /advice</a:t>
             </a:r>
           </a:p>
         </p:txBody>
@@ -15502,7 +15502,7 @@
                 </a:solidFill>
                 <a:latin typeface="Arial"/>
               </a:rPr>
-              <a:t>pose · face blur</a:t>
+              <a:t>pose · crop-at-upload</a:t>
             </a:r>
           </a:p>
         </p:txBody>

--- a/submission/Debie_Galleros_Pillar5_CapstoneProject_TechnicalDeck.pptx
+++ b/submission/Debie_Galleros_Pillar5_CapstoneProject_TechnicalDeck.pptx
@@ -4894,7 +4894,7 @@
                 </a:solidFill>
                 <a:latin typeface="Arial"/>
               </a:rPr>
-              <a:t>— the research path to photorealistic, fit-accurate generative try-on, upgrading today's size-proportional 2D scaling</a:t>
+              <a:t>— the research path beyond today's garment-conditioned rendering at a scaled size, toward true per-size drape</a:t>
             </a:r>
           </a:p>
         </p:txBody>
@@ -15331,7 +15331,7 @@
                 </a:solidFill>
                 <a:latin typeface="Arial"/>
               </a:rPr>
-              <a:t>/upload-profile (blur, pose)</a:t>
+              <a:t>/upload-profile (crop-at-upload, pose)</a:t>
             </a:r>
           </a:p>
           <a:p>
